--- a/docs/교재/통합반/08일차/통합반_08일차.pptx
+++ b/docs/교재/통합반/08일차/통합반_08일차.pptx
@@ -10595,7 +10595,7 @@
       </p:sp>
       <p:pic>
         <p:nvPicPr>
-          <p:cNvPr id="6" name="삽화:시나리오연결.svg" descr="illust_3692327486133753005_1791737262.png"/>
+          <p:cNvPr id="6" name="삽화:시나리오연결.svg" descr="illust_5261624034749525817_1791743471.png"/>
           <p:cNvPicPr>
             <a:picLocks noChangeAspect="1"/>
           </p:cNvPicPr>
@@ -13140,7 +13140,7 @@
       </p:sp>
       <p:pic>
         <p:nvPicPr>
-          <p:cNvPr id="6" name="삽화:갈래.svg" descr="illust_6032693139492680511_1791737262.png"/>
+          <p:cNvPr id="6" name="삽화:갈래.svg" descr="illust_5459651362760671149_1791743471.png"/>
           <p:cNvPicPr>
             <a:picLocks noChangeAspect="1"/>
           </p:cNvPicPr>
@@ -14803,7 +14803,7 @@
       </p:sp>
       <p:pic>
         <p:nvPicPr>
-          <p:cNvPr id="6" name="삽화:경계값.svg" descr="illust_8850101730560040076_1791737262.png"/>
+          <p:cNvPr id="6" name="삽화:경계값.svg" descr="illust_9054334515935915430_1791743471.png"/>
           <p:cNvPicPr>
             <a:picLocks noChangeAspect="1"/>
           </p:cNvPicPr>
@@ -18553,7 +18553,7 @@
       </p:sp>
       <p:pic>
         <p:nvPicPr>
-          <p:cNvPr id="6" name="삽화:회귀.svg" descr="illust_8937205466245466878_1791737262.png"/>
+          <p:cNvPr id="6" name="삽화:회귀.svg" descr="illust_4852831564065202254_1791743471.png"/>
           <p:cNvPicPr>
             <a:picLocks noChangeAspect="1"/>
           </p:cNvPicPr>
@@ -18793,7 +18793,7 @@
         </p:nvSpPr>
         <p:spPr>
           <a:xfrm>
-            <a:off x="10110541" y="3329513"/>
+            <a:off x="9968718" y="3329513"/>
             <a:ext cx="1418234" cy="577342"/>
           </a:xfrm>
           <a:prstGeom prst="rect">
@@ -18856,7 +18856,7 @@
         </p:nvSpPr>
         <p:spPr>
           <a:xfrm>
-            <a:off x="10110541" y="4511375"/>
+            <a:off x="9968718" y="4511375"/>
             <a:ext cx="1418234" cy="375920"/>
           </a:xfrm>
           <a:prstGeom prst="rect">
@@ -32763,7 +32763,7 @@
       </p:sp>
       <p:pic>
         <p:nvPicPr>
-          <p:cNvPr id="6" name="삽화:더해진것.svg" descr="illust_1678306813116997623_1791737262.png"/>
+          <p:cNvPr id="6" name="삽화:더해진것.svg" descr="illust_6507717740600135925_1791743471.png"/>
           <p:cNvPicPr>
             <a:picLocks noChangeAspect="1"/>
           </p:cNvPicPr>
@@ -34757,7 +34757,7 @@
       </p:sp>
       <p:pic>
         <p:nvPicPr>
-          <p:cNvPr id="6" name="삽화:사건위장치.svg" descr="illust_869540596938319954_1791737262.png"/>
+          <p:cNvPr id="6" name="삽화:사건위장치.svg" descr="illust_3413740078004833529_1791743471.png"/>
           <p:cNvPicPr>
             <a:picLocks noChangeAspect="1"/>
           </p:cNvPicPr>
@@ -41917,7 +41917,7 @@
       </p:sp>
       <p:pic>
         <p:nvPicPr>
-          <p:cNvPr id="6" name="삽화:명세와실행.svg" descr="illust_1528691563146651758_1791737262.png"/>
+          <p:cNvPr id="6" name="삽화:명세와실행.svg" descr="illust_7712132536419932652_1791743471.png"/>
           <p:cNvPicPr>
             <a:picLocks noChangeAspect="1"/>
           </p:cNvPicPr>
@@ -57180,7 +57180,7 @@
       </p:sp>
       <p:pic>
         <p:nvPicPr>
-          <p:cNvPr id="6" name="삽화:세부분.svg" descr="illust_4029382230006634914_1791737262.png"/>
+          <p:cNvPr id="6" name="삽화:세부분.svg" descr="illust_6754198493121838243_1791743471.png"/>
           <p:cNvPicPr>
             <a:picLocks noChangeAspect="1"/>
           </p:cNvPicPr>

--- a/docs/교재/통합반/08일차/통합반_08일차.pptx
+++ b/docs/교재/통합반/08일차/통합반_08일차.pptx
@@ -10524,7 +10524,7 @@
       </p:sp>
       <p:pic>
         <p:nvPicPr>
-          <p:cNvPr id="6" name="삽화:시나리오연결.svg" descr="illust_694750244587165434_1791770361.png"/>
+          <p:cNvPr id="6" name="삽화:시나리오연결.svg" descr="illust_1838894732574951998_1791770361.png"/>
           <p:cNvPicPr>
             <a:picLocks noChangeAspect="1"/>
           </p:cNvPicPr>
@@ -13101,7 +13101,7 @@
       </p:sp>
       <p:pic>
         <p:nvPicPr>
-          <p:cNvPr id="6" name="삽화:갈래.svg" descr="illust_4122981457127905075_1791770361.png"/>
+          <p:cNvPr id="6" name="삽화:갈래.svg" descr="illust_5354096279206439590_1791770361.png"/>
           <p:cNvPicPr>
             <a:picLocks noChangeAspect="1"/>
           </p:cNvPicPr>
@@ -14764,7 +14764,7 @@
       </p:sp>
       <p:pic>
         <p:nvPicPr>
-          <p:cNvPr id="6" name="삽화:경계값.svg" descr="illust_5844873532585568034_1791770361.png"/>
+          <p:cNvPr id="6" name="삽화:경계값.svg" descr="illust_1957525393106219541_1791770361.png"/>
           <p:cNvPicPr>
             <a:picLocks noChangeAspect="1"/>
           </p:cNvPicPr>
@@ -18514,7 +18514,7 @@
       </p:sp>
       <p:pic>
         <p:nvPicPr>
-          <p:cNvPr id="6" name="삽화:회귀.svg" descr="illust_4573758492570100468_1791770361.png"/>
+          <p:cNvPr id="6" name="삽화:회귀.svg" descr="illust_4014281245772830613_1791770361.png"/>
           <p:cNvPicPr>
             <a:picLocks noChangeAspect="1"/>
           </p:cNvPicPr>
@@ -32724,7 +32724,7 @@
       </p:sp>
       <p:pic>
         <p:nvPicPr>
-          <p:cNvPr id="6" name="삽화:더해진것.svg" descr="illust_6985839406701128776_1791770361.png"/>
+          <p:cNvPr id="6" name="삽화:더해진것.svg" descr="illust_6743247755273032733_1791770361.png"/>
           <p:cNvPicPr>
             <a:picLocks noChangeAspect="1"/>
           </p:cNvPicPr>
@@ -34718,7 +34718,7 @@
       </p:sp>
       <p:pic>
         <p:nvPicPr>
-          <p:cNvPr id="6" name="삽화:사건위장치.svg" descr="illust_1220188821900603772_1791770361.png"/>
+          <p:cNvPr id="6" name="삽화:사건위장치.svg" descr="illust_3116920256466686895_1791770361.png"/>
           <p:cNvPicPr>
             <a:picLocks noChangeAspect="1"/>
           </p:cNvPicPr>
@@ -36289,7 +36289,7 @@
       </p:sp>
       <p:pic>
         <p:nvPicPr>
-          <p:cNvPr id="6" name="삽화:근거자리.svg" descr="illust_83963451759440420_1791770361.png"/>
+          <p:cNvPr id="6" name="삽화:근거자리.svg" descr="illust_25736737251932724_1791770880.png"/>
           <p:cNvPicPr>
             <a:picLocks noChangeAspect="1"/>
           </p:cNvPicPr>
@@ -37806,7 +37806,7 @@
       </p:sp>
       <p:pic>
         <p:nvPicPr>
-          <p:cNvPr id="6" name="삽화:두문.svg" descr="illust_3757096446134611679_1791770361.png"/>
+          <p:cNvPr id="6" name="삽화:두문.svg" descr="illust_1804250236209205072_1791770880.png"/>
           <p:cNvPicPr>
             <a:picLocks noChangeAspect="1"/>
           </p:cNvPicPr>
@@ -41651,7 +41651,7 @@
       </p:sp>
       <p:pic>
         <p:nvPicPr>
-          <p:cNvPr id="6" name="삽화:명세와실행.svg" descr="illust_3015299465821269262_1791770361.png"/>
+          <p:cNvPr id="6" name="삽화:명세와실행.svg" descr="illust_1008336715061584643_1791770361.png"/>
           <p:cNvPicPr>
             <a:picLocks noChangeAspect="1"/>
           </p:cNvPicPr>
@@ -42183,7 +42183,7 @@
       </p:sp>
       <p:pic>
         <p:nvPicPr>
-          <p:cNvPr id="6" name="삽화:세산출물.svg" descr="illust_6059618243264607937_1791770361.png"/>
+          <p:cNvPr id="6" name="삽화:세산출물.svg" descr="illust_2146002995016036356_1791770880.png"/>
           <p:cNvPicPr>
             <a:picLocks noChangeAspect="1"/>
           </p:cNvPicPr>
@@ -44096,7 +44096,7 @@
       </p:sp>
       <p:pic>
         <p:nvPicPr>
-          <p:cNvPr id="6" name="삽화:산출물이음.svg" descr="illust_4605472501852536419_1791770361.png"/>
+          <p:cNvPr id="6" name="삽화:산출물이음.svg" descr="illust_4488752189449270094_1791770880.png"/>
           <p:cNvPicPr>
             <a:picLocks noChangeAspect="1"/>
           </p:cNvPicPr>
@@ -50736,7 +50736,7 @@
                 <a:ea typeface="맑은 고딕"/>
                 <a:cs typeface="맑은 고딕"/>
               </a:rPr>
-              <a:t>배운 내용을 바탕으로 정답을 맞춰보세요.</a:t>
+              <a:t>배운 내용을 바탕으로 정답을 맞혀 보세요.</a:t>
             </a:r>
           </a:p>
         </p:txBody>
@@ -55571,7 +55571,7 @@
       </p:sp>
       <p:pic>
         <p:nvPicPr>
-          <p:cNvPr id="6" name="삽화:세부분.svg" descr="illust_3417370539921465982_1791770361.png"/>
+          <p:cNvPr id="6" name="삽화:세부분.svg" descr="illust_1255170885538559570_1791770361.png"/>
           <p:cNvPicPr>
             <a:picLocks noChangeAspect="1"/>
           </p:cNvPicPr>

--- a/docs/교재/통합반/08일차/통합반_08일차.pptx
+++ b/docs/교재/통합반/08일차/통합반_08일차.pptx
@@ -1824,7 +1824,7 @@
           <a:lstStyle/>
           <a:p>
             <a:r>
-              <a:t>이 단원의 용어를 한 바퀴로 이었습니다. 명세의 계약과 금지 조건에서 시나리오의 입력값과 기대값이 나옵니다. 시나리오를 실행해 단언으로 실제 결과를 견주고, 실패하면 원인이 있는 곳을 가려 고칩니다. 마지막으로 기존 시나리오까지 모두 다시 실행합니다. 요구가 바뀌면 이 바퀴를 다시 돕니다.</a:t>
+              <a:t>에이전트가 여러 시스템의 데이터를 함께 읽을 때 쓰는 개념 하나를 더 봅니다. 설비의 측정값은 시계열 DB에, 정비와 부품의 기록은 업무 DB에 있습니다. 이런 데이터를 한곳으로 옮겨 모으지 않고 출처에 둔 채 연결해 함께 읽는 방식을 데이터 패브릭이라고 합니다. 읽은 값마다 출처와 읽은 시각을 붙이고, 한 출처가 실패하면 읽힌 값만 주면서 그 사실을 함께 알립니다.</a:t>
             </a:r>
           </a:p>
         </p:txBody>
@@ -1894,7 +1894,7 @@
           <a:lstStyle/>
           <a:p>
             <a:r>
-              <a:t>첫 실습에서는 시나리오를 직접 적습니다. 지난 시간에 쓴 spec.md와 같은 에이전트를 그대로 씁니다. 일반 정비, 긴급 정비, 필수 정보 누락, 승인 거절, 도구 오류의 다섯 경우마다 Given, When, Then과 입력값, 기대 상태, 지켜야 할 출력 계약을 적습니다. 끝나면 다음 실습에서 실행에 연결할 시나리오 문서가 남습니다.</a:t>
+              <a:t>이 단원의 용어를 한 바퀴로 이었습니다. 명세의 계약과 금지 조건에서 시나리오의 입력값과 기대값이 나옵니다. 시나리오를 실행해 단언으로 실제 결과를 견주고, 실패하면 원인이 있는 곳을 가려 고칩니다. 마지막으로 기존 시나리오까지 모두 다시 실행합니다. 요구가 바뀌면 이 바퀴를 다시 돕니다.</a:t>
             </a:r>
           </a:p>
         </p:txBody>
@@ -1964,7 +1964,7 @@
           <a:lstStyle/>
           <a:p>
             <a:r>
-              <a:t>둘째 실습에서는 앞에서 적은 시나리오를 실행에 연결합니다. 준비된 자동 시험이나 반복 실행 스크립트에 시나리오를 잇고, 같은 입력으로 여러 번 실행합니다. 실제 출력과 기대값을 견주어 어느 조건에서 규칙을 어겼는지를 로그와 결과 파일에서 확인합니다. 어긋난 것이 표현 차이인지 계약 위반인지를 가르는 데까지가 이 실습입니다.</a:t>
+              <a:t>첫 실습에서는 시나리오를 직접 적습니다. 지난 시간에 쓴 spec.md와 같은 에이전트를 그대로 씁니다. 일반 정비, 긴급 정비, 필수 정보 누락, 승인 거절, 도구 오류의 다섯 경우마다 Given, When, Then과 입력값, 기대 상태, 지켜야 할 출력 계약을 적습니다. 끝나면 다음 실습에서 실행에 연결할 시나리오 문서가 남습니다.</a:t>
             </a:r>
           </a:p>
         </p:txBody>
@@ -2034,7 +2034,7 @@
           <a:lstStyle/>
           <a:p>
             <a:r>
-              <a:t>셋째 실습에서는 실패를 고칩니다. 실제로 실패한 시나리오만 골라 원인을 따라가고, 프롬프트와 명세와 코드 가운데 고칠 곳을 가려 고친 뒤 다시 실행합니다. 마지막에는 전체 회귀를 돌려, 긴급 조건이 동작하면서 기존의 일반 요청과 보류와 거절 조건이 그대로인지를 확인합니다.</a:t>
+              <a:t>둘째 실습에서는 앞에서 적은 시나리오를 실행에 연결합니다. 준비된 자동 시험이나 반복 실행 스크립트에 시나리오를 잇고, 같은 입력으로 여러 번 실행합니다. 실제 출력과 기대값을 견주어 어느 조건에서 규칙을 어겼는지를 로그와 결과 파일에서 확인합니다. 어긋난 것이 표현 차이인지 계약 위반인지를 가르는 데까지가 이 실습입니다.</a:t>
             </a:r>
           </a:p>
         </p:txBody>
@@ -2174,7 +2174,7 @@
           <a:lstStyle/>
           <a:p>
             <a:r>
-              <a:t>마지막 실습에 필요한 개념 하나를 먼저 봅니다. 설비의 측정값은 시계열 DB에, 정비와 부품의 기록은 업무 DB에 있습니다. 이런 데이터를 한곳으로 옮겨 모으지 않고 출처에 둔 채 연결해 함께 읽는 방식을 데이터 패브릭이라고 합니다. 읽은 값마다 출처와 읽은 시각을 붙이고, 한 출처가 실패하면 읽힌 값만 주면서 그 사실을 함께 알립니다.</a:t>
+              <a:t>셋째 실습에서는 실패를 고칩니다. 실제로 실패한 시나리오만 골라 원인을 따라가고, 프롬프트와 명세와 코드 가운데 고칠 곳을 가려 고친 뒤 다시 실행합니다. 마지막에는 전체 회귀를 돌려, 긴급 조건이 동작하면서 기존의 일반 요청과 보류와 거절 조건이 그대로인지를 확인합니다.</a:t>
             </a:r>
           </a:p>
         </p:txBody>
@@ -2244,7 +2244,7 @@
           <a:lstStyle/>
           <a:p>
             <a:r>
-              <a:t>넷째 실습에서는 교대 근무의 인수인계서를 만듭니다. 설비 이벤트와 정비 이력과 부품 DB는 서로 다른 곳에 있는 데이터입니다. 방금 본 데이터 패브릭의 방식대로 옮겨 모으지 않고 연결해 읽습니다. 세 출처의 조회 결과를 엮어 완료 작업, 미완료 요청, 주의 사항을 적고 항목마다 근거가 된 시각을 붙입니다.</a:t>
+              <a:t>넷째 실습에서는 교대 근무의 인수인계서를 만듭니다. 설비 이벤트와 정비 이력과 부품 DB는 서로 다른 곳에 있는 데이터입니다. 앞에서 본 데이터 패브릭의 방식대로 옮겨 모으지 않고 연결해 읽습니다. 세 출처의 조회 결과를 엮어 완료 작업, 미완료 요청, 주의 사항을 적고 항목마다 근거가 된 시각을 붙입니다.</a:t>
             </a:r>
           </a:p>
         </p:txBody>
@@ -10524,7 +10524,7 @@
       </p:sp>
       <p:pic>
         <p:nvPicPr>
-          <p:cNvPr id="6" name="삽화:시나리오연결.svg" descr="illust_1838894732574951998_1791770361.png"/>
+          <p:cNvPr id="6" name="삽화:시나리오연결.svg" descr="illust_552973796784960864_1791770361.png"/>
           <p:cNvPicPr>
             <a:picLocks noChangeAspect="1"/>
           </p:cNvPicPr>
@@ -13101,7 +13101,7 @@
       </p:sp>
       <p:pic>
         <p:nvPicPr>
-          <p:cNvPr id="6" name="삽화:갈래.svg" descr="illust_5354096279206439590_1791770361.png"/>
+          <p:cNvPr id="6" name="삽화:갈래.svg" descr="illust_8348411623097893620_1791770361.png"/>
           <p:cNvPicPr>
             <a:picLocks noChangeAspect="1"/>
           </p:cNvPicPr>
@@ -14764,7 +14764,7 @@
       </p:sp>
       <p:pic>
         <p:nvPicPr>
-          <p:cNvPr id="6" name="삽화:경계값.svg" descr="illust_1957525393106219541_1791770361.png"/>
+          <p:cNvPr id="6" name="삽화:경계값.svg" descr="illust_2470391750368120029_1791770361.png"/>
           <p:cNvPicPr>
             <a:picLocks noChangeAspect="1"/>
           </p:cNvPicPr>
@@ -18514,7 +18514,7 @@
       </p:sp>
       <p:pic>
         <p:nvPicPr>
-          <p:cNvPr id="6" name="삽화:회귀.svg" descr="illust_4014281245772830613_1791770361.png"/>
+          <p:cNvPr id="6" name="삽화:회귀.svg" descr="illust_2297641508034220164_1791770361.png"/>
           <p:cNvPicPr>
             <a:picLocks noChangeAspect="1"/>
           </p:cNvPicPr>
@@ -25418,7 +25418,7 @@
                 <a:ea typeface="맑은 고딕"/>
                 <a:cs typeface="맑은 고딕"/>
               </a:rPr>
-              <a:t>단원 정리: 검증의 한 바퀴</a:t>
+              <a:t>데이터 패브릭: 출처에 둔 채 연결해 함께 읽는 방식</a:t>
             </a:r>
           </a:p>
         </p:txBody>
@@ -25457,7 +25457,7 @@
                 <a:ea typeface="맑은 고딕"/>
                 <a:cs typeface="맑은 고딕"/>
               </a:rPr>
-              <a:t>명세에서 시나리오를 만들어 실행하고, 실패를 고친 뒤 전체를 다시 실행하는 한 바퀴가 요구가 바뀔 때마다 돈다.</a:t>
+              <a:t>데이터 패브릭은 여러 시스템의 데이터를 출처에 둔 채 함께 읽는 방식이며, 값마다 출처와 읽은 시각을 붙인다.</a:t>
             </a:r>
           </a:p>
         </p:txBody>
@@ -25538,16 +25538,16 @@
         </p:nvSpPr>
         <p:spPr>
           <a:xfrm>
-            <a:off x="548640" y="2626423"/>
-            <a:ext cx="1911644" cy="2729864"/>
+            <a:off x="548640" y="1961388"/>
+            <a:ext cx="11094415" cy="1316736"/>
           </a:xfrm>
           <a:prstGeom prst="roundRect">
             <a:avLst>
-              <a:gd name="adj" fmla="val 5000"/>
+              <a:gd name="adj" fmla="val 6000"/>
             </a:avLst>
           </a:prstGeom>
           <a:solidFill>
-            <a:srgbClr val="F3F6F9"/>
+            <a:srgbClr val="E7F3FD"/>
           </a:solidFill>
           <a:ln>
             <a:noFill/>
@@ -25563,20 +25563,125 @@
       </p:sp>
       <p:sp>
         <p:nvSpPr>
-          <p:cNvPr id="7" name="Oval 6"/>
+          <p:cNvPr id="7" name="TextBox 6"/>
+          <p:cNvSpPr txBox="1"/>
+          <p:nvPr/>
+        </p:nvSpPr>
+        <p:spPr>
+          <a:xfrm>
+            <a:off x="640080" y="1933956"/>
+            <a:ext cx="3291839" cy="1371600"/>
+          </a:xfrm>
+          <a:prstGeom prst="rect">
+            <a:avLst/>
+          </a:prstGeom>
+          <a:noFill/>
+        </p:spPr>
+        <p:txBody>
+          <a:bodyPr wrap="square" anchor="ctr"/>
+          <a:lstStyle/>
+          <a:p>
+            <a:pPr algn="l">
+              <a:lnSpc>
+                <a:spcPct val="110000"/>
+              </a:lnSpc>
+              <a:spcAft>
+                <a:spcPts val="200"/>
+              </a:spcAft>
+            </a:pPr>
+            <a:r>
+              <a:rPr sz="1800" b="1">
+                <a:solidFill>
+                  <a:srgbClr val="13294B"/>
+                </a:solidFill>
+                <a:latin typeface="맑은 고딕"/>
+                <a:ea typeface="맑은 고딕"/>
+                <a:cs typeface="맑은 고딕"/>
+              </a:rPr>
+              <a:t>데이터 패브릭</a:t>
+            </a:r>
+          </a:p>
+          <a:p>
+            <a:pPr algn="l">
+              <a:lnSpc>
+                <a:spcPct val="110000"/>
+              </a:lnSpc>
+              <a:spcAft>
+                <a:spcPts val="200"/>
+              </a:spcAft>
+            </a:pPr>
+            <a:r>
+              <a:rPr sz="1150" b="0">
+                <a:solidFill>
+                  <a:srgbClr val="556175"/>
+                </a:solidFill>
+                <a:latin typeface="맑은 고딕"/>
+                <a:ea typeface="맑은 고딕"/>
+                <a:cs typeface="맑은 고딕"/>
+              </a:rPr>
+              <a:t>Data Fabric</a:t>
+            </a:r>
+          </a:p>
+        </p:txBody>
+      </p:sp>
+      <p:sp>
+        <p:nvSpPr>
+          <p:cNvPr id="8" name="TextBox 7"/>
+          <p:cNvSpPr txBox="1"/>
+          <p:nvPr/>
+        </p:nvSpPr>
+        <p:spPr>
+          <a:xfrm>
+            <a:off x="4023359" y="1933956"/>
+            <a:ext cx="7528255" cy="1371600"/>
+          </a:xfrm>
+          <a:prstGeom prst="rect">
+            <a:avLst/>
+          </a:prstGeom>
+          <a:noFill/>
+        </p:spPr>
+        <p:txBody>
+          <a:bodyPr wrap="square" anchor="ctr"/>
+          <a:lstStyle/>
+          <a:p>
+            <a:pPr algn="l">
+              <a:lnSpc>
+                <a:spcPct val="110000"/>
+              </a:lnSpc>
+              <a:spcAft>
+                <a:spcPts val="300"/>
+              </a:spcAft>
+            </a:pPr>
+            <a:r>
+              <a:rPr sz="1400" b="0">
+                <a:solidFill>
+                  <a:srgbClr val="1F2A3A"/>
+                </a:solidFill>
+                <a:latin typeface="맑은 고딕"/>
+                <a:ea typeface="맑은 고딕"/>
+                <a:cs typeface="맑은 고딕"/>
+              </a:rPr>
+              <a:t>여러 시스템의 데이터를 한곳으로 옮겨 모으지 않고, 출처에 둔 채 연결해 한 번의 물음으로 함께 읽는 방식이다.</a:t>
+            </a:r>
+          </a:p>
+        </p:txBody>
+      </p:sp>
+      <p:sp>
+        <p:nvSpPr>
+          <p:cNvPr id="9" name="Rectangle 8"/>
           <p:cNvSpPr/>
           <p:nvPr/>
         </p:nvSpPr>
         <p:spPr>
           <a:xfrm>
-            <a:off x="1138702" y="2809303"/>
-            <a:ext cx="731520" cy="731520"/>
-          </a:xfrm>
-          <a:prstGeom prst="ellipse">
+            <a:off x="548640" y="3296412"/>
+            <a:ext cx="11094415" cy="13716"/>
+          </a:xfrm>
+          <a:prstGeom prst="rect">
             <a:avLst/>
           </a:prstGeom>
           <a:solidFill>
-            <a:srgbClr val="FFFFFF"/>
+            <a:srgbClr val="D3D9E1"/>
           </a:solidFill>
           <a:ln>
             <a:noFill/>
@@ -25590,60 +25695,36 @@
           </a:p>
         </p:txBody>
       </p:sp>
-      <p:pic>
-        <p:nvPicPr>
-          <p:cNvPr id="8" name="아이콘:file-text" descr="file-text_13294B_1.6.png"/>
-          <p:cNvPicPr>
-            <a:picLocks noChangeAspect="1"/>
-          </p:cNvPicPr>
-          <p:nvPr/>
-        </p:nvPicPr>
-        <p:blipFill>
-          <a:blip r:embed="rId3"/>
-          <a:stretch>
-            <a:fillRect/>
-          </a:stretch>
-        </p:blipFill>
-        <p:spPr>
-          <a:xfrm>
-            <a:off x="1292321" y="2962922"/>
-            <a:ext cx="424281" cy="424281"/>
-          </a:xfrm>
-          <a:prstGeom prst="rect">
-            <a:avLst/>
-          </a:prstGeom>
-        </p:spPr>
-      </p:pic>
-      <p:sp>
-        <p:nvSpPr>
-          <p:cNvPr id="9" name="TextBox 8"/>
-          <p:cNvSpPr txBox="1"/>
-          <p:nvPr/>
-        </p:nvSpPr>
-        <p:spPr>
-          <a:xfrm>
-            <a:off x="621792" y="3613975"/>
-            <a:ext cx="1765340" cy="1669160"/>
-          </a:xfrm>
-          <a:prstGeom prst="rect">
-            <a:avLst/>
-          </a:prstGeom>
-          <a:noFill/>
-        </p:spPr>
-        <p:txBody>
-          <a:bodyPr wrap="square" anchor="t"/>
-          <a:lstStyle/>
-          <a:p>
-            <a:pPr algn="ctr">
+      <p:sp>
+        <p:nvSpPr>
+          <p:cNvPr id="10" name="TextBox 9"/>
+          <p:cNvSpPr txBox="1"/>
+          <p:nvPr/>
+        </p:nvSpPr>
+        <p:spPr>
+          <a:xfrm>
+            <a:off x="640080" y="3305556"/>
+            <a:ext cx="3291839" cy="1371600"/>
+          </a:xfrm>
+          <a:prstGeom prst="rect">
+            <a:avLst/>
+          </a:prstGeom>
+          <a:noFill/>
+        </p:spPr>
+        <p:txBody>
+          <a:bodyPr wrap="square" anchor="ctr"/>
+          <a:lstStyle/>
+          <a:p>
+            <a:pPr algn="l">
               <a:lnSpc>
                 <a:spcPct val="110000"/>
               </a:lnSpc>
               <a:spcAft>
-                <a:spcPts val="400"/>
+                <a:spcPts val="200"/>
               </a:spcAft>
             </a:pPr>
             <a:r>
-              <a:rPr sz="1550" b="1">
+              <a:rPr sz="1800" b="1">
                 <a:solidFill>
                   <a:srgbClr val="13294B"/>
                 </a:solidFill>
@@ -25651,20 +25732,62 @@
                 <a:ea typeface="맑은 고딕"/>
                 <a:cs typeface="맑은 고딕"/>
               </a:rPr>
-              <a:t>명세</a:t>
-            </a:r>
-          </a:p>
-          <a:p>
-            <a:pPr algn="ctr">
+              <a:t>출처와 읽은 시각</a:t>
+            </a:r>
+          </a:p>
+          <a:p>
+            <a:pPr algn="l">
               <a:lnSpc>
                 <a:spcPct val="110000"/>
               </a:lnSpc>
               <a:spcAft>
-                <a:spcPts val="400"/>
+                <a:spcPts val="200"/>
               </a:spcAft>
             </a:pPr>
             <a:r>
-              <a:rPr sz="1250" b="0">
+              <a:rPr sz="1150" b="0">
+                <a:solidFill>
+                  <a:srgbClr val="556175"/>
+                </a:solidFill>
+                <a:latin typeface="맑은 고딕"/>
+                <a:ea typeface="맑은 고딕"/>
+                <a:cs typeface="맑은 고딕"/>
+              </a:rPr>
+              <a:t>값의 근거</a:t>
+            </a:r>
+          </a:p>
+        </p:txBody>
+      </p:sp>
+      <p:sp>
+        <p:nvSpPr>
+          <p:cNvPr id="11" name="TextBox 10"/>
+          <p:cNvSpPr txBox="1"/>
+          <p:nvPr/>
+        </p:nvSpPr>
+        <p:spPr>
+          <a:xfrm>
+            <a:off x="4023359" y="3305556"/>
+            <a:ext cx="7528255" cy="1371600"/>
+          </a:xfrm>
+          <a:prstGeom prst="rect">
+            <a:avLst/>
+          </a:prstGeom>
+          <a:noFill/>
+        </p:spPr>
+        <p:txBody>
+          <a:bodyPr wrap="square" anchor="ctr"/>
+          <a:lstStyle/>
+          <a:p>
+            <a:pPr algn="l">
+              <a:lnSpc>
+                <a:spcPct val="110000"/>
+              </a:lnSpc>
+              <a:spcAft>
+                <a:spcPts val="300"/>
+              </a:spcAft>
+            </a:pPr>
+            <a:r>
+              <a:rPr sz="1400" b="0">
                 <a:solidFill>
                   <a:srgbClr val="1F2A3A"/>
                 </a:solidFill>
@@ -25672,20 +25795,20 @@
                 <a:ea typeface="맑은 고딕"/>
                 <a:cs typeface="맑은 고딕"/>
               </a:rPr>
-              <a:t>계약, 금지 조건,</a:t>
-            </a:r>
-          </a:p>
-          <a:p>
-            <a:pPr algn="ctr">
+              <a:t>읽은 값마다 어느 시스템에서 언제 읽었는지를 붙인다.</a:t>
+            </a:r>
+          </a:p>
+          <a:p>
+            <a:pPr algn="l">
               <a:lnSpc>
                 <a:spcPct val="110000"/>
               </a:lnSpc>
               <a:spcAft>
-                <a:spcPts val="400"/>
+                <a:spcPts val="300"/>
               </a:spcAft>
             </a:pPr>
             <a:r>
-              <a:rPr sz="1250" b="0">
+              <a:rPr sz="1400" b="0">
                 <a:solidFill>
                   <a:srgbClr val="1F2A3A"/>
                 </a:solidFill>
@@ -25693,27 +25816,27 @@
                 <a:ea typeface="맑은 고딕"/>
                 <a:cs typeface="맑은 고딕"/>
               </a:rPr>
-              <a:t>수용 기준</a:t>
-            </a:r>
-          </a:p>
-        </p:txBody>
-      </p:sp>
-      <p:sp>
-        <p:nvSpPr>
-          <p:cNvPr id="10" name="Right Arrow 9"/>
+              <a:t>예: 납기 오더는 업무 DB에서, 유온은 시계열 DB에서 읽는다.</a:t>
+            </a:r>
+          </a:p>
+        </p:txBody>
+      </p:sp>
+      <p:sp>
+        <p:nvSpPr>
+          <p:cNvPr id="12" name="Rectangle 11"/>
           <p:cNvSpPr/>
           <p:nvPr/>
         </p:nvSpPr>
         <p:spPr>
           <a:xfrm>
-            <a:off x="2524292" y="3854196"/>
-            <a:ext cx="256031" cy="274320"/>
-          </a:xfrm>
-          <a:prstGeom prst="rightArrow">
+            <a:off x="548640" y="4668012"/>
+            <a:ext cx="11094415" cy="13716"/>
+          </a:xfrm>
+          <a:prstGeom prst="rect">
             <a:avLst/>
           </a:prstGeom>
           <a:solidFill>
-            <a:srgbClr val="13294B"/>
+            <a:srgbClr val="D3D9E1"/>
           </a:solidFill>
           <a:ln>
             <a:noFill/>
@@ -25729,88 +25852,67 @@
       </p:sp>
       <p:sp>
         <p:nvSpPr>
-          <p:cNvPr id="11" name="Rounded Rectangle 10"/>
-          <p:cNvSpPr/>
-          <p:nvPr/>
-        </p:nvSpPr>
-        <p:spPr>
-          <a:xfrm>
-            <a:off x="2844332" y="2626423"/>
-            <a:ext cx="1911644" cy="2729864"/>
-          </a:xfrm>
-          <a:prstGeom prst="roundRect">
-            <a:avLst>
-              <a:gd name="adj" fmla="val 5000"/>
-            </a:avLst>
-          </a:prstGeom>
-          <a:solidFill>
-            <a:srgbClr val="F3F6F9"/>
-          </a:solidFill>
-          <a:ln>
-            <a:noFill/>
-          </a:ln>
-        </p:spPr>
-        <p:txBody>
-          <a:bodyPr rtlCol="0" anchor="ctr"/>
-          <a:lstStyle/>
-          <a:p>
-            <a:pPr algn="ctr"/>
-          </a:p>
-        </p:txBody>
-      </p:sp>
-      <p:sp>
-        <p:nvSpPr>
-          <p:cNvPr id="12" name="Oval 11"/>
-          <p:cNvSpPr/>
-          <p:nvPr/>
-        </p:nvSpPr>
-        <p:spPr>
-          <a:xfrm>
-            <a:off x="3434394" y="2809303"/>
-            <a:ext cx="731520" cy="731520"/>
-          </a:xfrm>
-          <a:prstGeom prst="ellipse">
-            <a:avLst/>
-          </a:prstGeom>
-          <a:solidFill>
-            <a:srgbClr val="FFFFFF"/>
-          </a:solidFill>
-          <a:ln>
-            <a:noFill/>
-          </a:ln>
-        </p:spPr>
-        <p:txBody>
-          <a:bodyPr rtlCol="0" anchor="ctr"/>
-          <a:lstStyle/>
-          <a:p>
-            <a:pPr algn="ctr"/>
-          </a:p>
-        </p:txBody>
-      </p:sp>
-      <p:pic>
-        <p:nvPicPr>
-          <p:cNvPr id="13" name="아이콘:checklist" descr="checklist_13294B_1.6.png"/>
-          <p:cNvPicPr>
-            <a:picLocks noChangeAspect="1"/>
-          </p:cNvPicPr>
-          <p:nvPr/>
-        </p:nvPicPr>
-        <p:blipFill>
-          <a:blip r:embed="rId4"/>
-          <a:stretch>
-            <a:fillRect/>
-          </a:stretch>
-        </p:blipFill>
-        <p:spPr>
-          <a:xfrm>
-            <a:off x="3588014" y="2962922"/>
-            <a:ext cx="424281" cy="424281"/>
-          </a:xfrm>
-          <a:prstGeom prst="rect">
-            <a:avLst/>
-          </a:prstGeom>
-        </p:spPr>
-      </p:pic>
+          <p:cNvPr id="13" name="TextBox 12"/>
+          <p:cNvSpPr txBox="1"/>
+          <p:nvPr/>
+        </p:nvSpPr>
+        <p:spPr>
+          <a:xfrm>
+            <a:off x="640080" y="4677156"/>
+            <a:ext cx="3291839" cy="1371600"/>
+          </a:xfrm>
+          <a:prstGeom prst="rect">
+            <a:avLst/>
+          </a:prstGeom>
+          <a:noFill/>
+        </p:spPr>
+        <p:txBody>
+          <a:bodyPr wrap="square" anchor="ctr"/>
+          <a:lstStyle/>
+          <a:p>
+            <a:pPr algn="l">
+              <a:lnSpc>
+                <a:spcPct val="110000"/>
+              </a:lnSpc>
+              <a:spcAft>
+                <a:spcPts val="200"/>
+              </a:spcAft>
+            </a:pPr>
+            <a:r>
+              <a:rPr sz="1800" b="1">
+                <a:solidFill>
+                  <a:srgbClr val="13294B"/>
+                </a:solidFill>
+                <a:latin typeface="맑은 고딕"/>
+                <a:ea typeface="맑은 고딕"/>
+                <a:cs typeface="맑은 고딕"/>
+              </a:rPr>
+              <a:t>일부만 읽힌 결과</a:t>
+            </a:r>
+          </a:p>
+          <a:p>
+            <a:pPr algn="l">
+              <a:lnSpc>
+                <a:spcPct val="110000"/>
+              </a:lnSpc>
+              <a:spcAft>
+                <a:spcPts val="200"/>
+              </a:spcAft>
+            </a:pPr>
+            <a:r>
+              <a:rPr sz="1150" b="0">
+                <a:solidFill>
+                  <a:srgbClr val="556175"/>
+                </a:solidFill>
+                <a:latin typeface="맑은 고딕"/>
+                <a:ea typeface="맑은 고딕"/>
+                <a:cs typeface="맑은 고딕"/>
+              </a:rPr>
+              <a:t>부분 결과</a:t>
+            </a:r>
+          </a:p>
+        </p:txBody>
+      </p:sp>
       <p:sp>
         <p:nvSpPr>
           <p:cNvPr id="14" name="TextBox 13"/>
@@ -25819,49 +25921,28 @@
         </p:nvSpPr>
         <p:spPr>
           <a:xfrm>
-            <a:off x="2917484" y="3613975"/>
-            <a:ext cx="1765340" cy="1669160"/>
-          </a:xfrm>
-          <a:prstGeom prst="rect">
-            <a:avLst/>
-          </a:prstGeom>
-          <a:noFill/>
-        </p:spPr>
-        <p:txBody>
-          <a:bodyPr wrap="square" anchor="t"/>
-          <a:lstStyle/>
-          <a:p>
-            <a:pPr algn="ctr">
+            <a:off x="4023359" y="4677156"/>
+            <a:ext cx="7528255" cy="1371600"/>
+          </a:xfrm>
+          <a:prstGeom prst="rect">
+            <a:avLst/>
+          </a:prstGeom>
+          <a:noFill/>
+        </p:spPr>
+        <p:txBody>
+          <a:bodyPr wrap="square" anchor="ctr"/>
+          <a:lstStyle/>
+          <a:p>
+            <a:pPr algn="l">
               <a:lnSpc>
                 <a:spcPct val="110000"/>
               </a:lnSpc>
               <a:spcAft>
-                <a:spcPts val="400"/>
+                <a:spcPts val="300"/>
               </a:spcAft>
             </a:pPr>
             <a:r>
-              <a:rPr sz="1550" b="1">
-                <a:solidFill>
-                  <a:srgbClr val="13294B"/>
-                </a:solidFill>
-                <a:latin typeface="맑은 고딕"/>
-                <a:ea typeface="맑은 고딕"/>
-                <a:cs typeface="맑은 고딕"/>
-              </a:rPr>
-              <a:t>시나리오</a:t>
-            </a:r>
-          </a:p>
-          <a:p>
-            <a:pPr algn="ctr">
-              <a:lnSpc>
-                <a:spcPct val="110000"/>
-              </a:lnSpc>
-              <a:spcAft>
-                <a:spcPts val="400"/>
-              </a:spcAft>
-            </a:pPr>
-            <a:r>
-              <a:rPr sz="1250" b="0">
+              <a:rPr sz="1400" b="0">
                 <a:solidFill>
                   <a:srgbClr val="1F2A3A"/>
                 </a:solidFill>
@@ -25869,621 +25950,7 @@
                 <a:ea typeface="맑은 고딕"/>
                 <a:cs typeface="맑은 고딕"/>
               </a:rPr>
-              <a:t>Given · When · Then,</a:t>
-            </a:r>
-          </a:p>
-          <a:p>
-            <a:pPr algn="ctr">
-              <a:lnSpc>
-                <a:spcPct val="110000"/>
-              </a:lnSpc>
-              <a:spcAft>
-                <a:spcPts val="400"/>
-              </a:spcAft>
-            </a:pPr>
-            <a:r>
-              <a:rPr sz="1250" b="0">
-                <a:solidFill>
-                  <a:srgbClr val="1F2A3A"/>
-                </a:solidFill>
-                <a:latin typeface="맑은 고딕"/>
-                <a:ea typeface="맑은 고딕"/>
-                <a:cs typeface="맑은 고딕"/>
-              </a:rPr>
-              <a:t>입력값과 기대값</a:t>
-            </a:r>
-          </a:p>
-        </p:txBody>
-      </p:sp>
-      <p:sp>
-        <p:nvSpPr>
-          <p:cNvPr id="15" name="Right Arrow 14"/>
-          <p:cNvSpPr/>
-          <p:nvPr/>
-        </p:nvSpPr>
-        <p:spPr>
-          <a:xfrm>
-            <a:off x="4819985" y="3854196"/>
-            <a:ext cx="256031" cy="274320"/>
-          </a:xfrm>
-          <a:prstGeom prst="rightArrow">
-            <a:avLst/>
-          </a:prstGeom>
-          <a:solidFill>
-            <a:srgbClr val="13294B"/>
-          </a:solidFill>
-          <a:ln>
-            <a:noFill/>
-          </a:ln>
-        </p:spPr>
-        <p:txBody>
-          <a:bodyPr rtlCol="0" anchor="ctr"/>
-          <a:lstStyle/>
-          <a:p>
-            <a:pPr algn="ctr"/>
-          </a:p>
-        </p:txBody>
-      </p:sp>
-      <p:sp>
-        <p:nvSpPr>
-          <p:cNvPr id="16" name="Rounded Rectangle 15"/>
-          <p:cNvSpPr/>
-          <p:nvPr/>
-        </p:nvSpPr>
-        <p:spPr>
-          <a:xfrm>
-            <a:off x="5140025" y="2626423"/>
-            <a:ext cx="1911644" cy="2729864"/>
-          </a:xfrm>
-          <a:prstGeom prst="roundRect">
-            <a:avLst>
-              <a:gd name="adj" fmla="val 5000"/>
-            </a:avLst>
-          </a:prstGeom>
-          <a:solidFill>
-            <a:srgbClr val="F3F6F9"/>
-          </a:solidFill>
-          <a:ln>
-            <a:noFill/>
-          </a:ln>
-        </p:spPr>
-        <p:txBody>
-          <a:bodyPr rtlCol="0" anchor="ctr"/>
-          <a:lstStyle/>
-          <a:p>
-            <a:pPr algn="ctr"/>
-          </a:p>
-        </p:txBody>
-      </p:sp>
-      <p:sp>
-        <p:nvSpPr>
-          <p:cNvPr id="17" name="Oval 16"/>
-          <p:cNvSpPr/>
-          <p:nvPr/>
-        </p:nvSpPr>
-        <p:spPr>
-          <a:xfrm>
-            <a:off x="5730087" y="2809303"/>
-            <a:ext cx="731520" cy="731520"/>
-          </a:xfrm>
-          <a:prstGeom prst="ellipse">
-            <a:avLst/>
-          </a:prstGeom>
-          <a:solidFill>
-            <a:srgbClr val="FFFFFF"/>
-          </a:solidFill>
-          <a:ln>
-            <a:noFill/>
-          </a:ln>
-        </p:spPr>
-        <p:txBody>
-          <a:bodyPr rtlCol="0" anchor="ctr"/>
-          <a:lstStyle/>
-          <a:p>
-            <a:pPr algn="ctr"/>
-          </a:p>
-        </p:txBody>
-      </p:sp>
-      <p:pic>
-        <p:nvPicPr>
-          <p:cNvPr id="18" name="아이콘:player-play" descr="player-play_13294B_1.6.png"/>
-          <p:cNvPicPr>
-            <a:picLocks noChangeAspect="1"/>
-          </p:cNvPicPr>
-          <p:nvPr/>
-        </p:nvPicPr>
-        <p:blipFill>
-          <a:blip r:embed="rId5"/>
-          <a:stretch>
-            <a:fillRect/>
-          </a:stretch>
-        </p:blipFill>
-        <p:spPr>
-          <a:xfrm>
-            <a:off x="5883706" y="2962922"/>
-            <a:ext cx="424281" cy="424281"/>
-          </a:xfrm>
-          <a:prstGeom prst="rect">
-            <a:avLst/>
-          </a:prstGeom>
-        </p:spPr>
-      </p:pic>
-      <p:sp>
-        <p:nvSpPr>
-          <p:cNvPr id="19" name="TextBox 18"/>
-          <p:cNvSpPr txBox="1"/>
-          <p:nvPr/>
-        </p:nvSpPr>
-        <p:spPr>
-          <a:xfrm>
-            <a:off x="5213177" y="3613975"/>
-            <a:ext cx="1765340" cy="1669160"/>
-          </a:xfrm>
-          <a:prstGeom prst="rect">
-            <a:avLst/>
-          </a:prstGeom>
-          <a:noFill/>
-        </p:spPr>
-        <p:txBody>
-          <a:bodyPr wrap="square" anchor="t"/>
-          <a:lstStyle/>
-          <a:p>
-            <a:pPr algn="ctr">
-              <a:lnSpc>
-                <a:spcPct val="110000"/>
-              </a:lnSpc>
-              <a:spcAft>
-                <a:spcPts val="400"/>
-              </a:spcAft>
-            </a:pPr>
-            <a:r>
-              <a:rPr sz="1550" b="1">
-                <a:solidFill>
-                  <a:srgbClr val="13294B"/>
-                </a:solidFill>
-                <a:latin typeface="맑은 고딕"/>
-                <a:ea typeface="맑은 고딕"/>
-                <a:cs typeface="맑은 고딕"/>
-              </a:rPr>
-              <a:t>실행과 대조</a:t>
-            </a:r>
-          </a:p>
-          <a:p>
-            <a:pPr algn="ctr">
-              <a:lnSpc>
-                <a:spcPct val="110000"/>
-              </a:lnSpc>
-              <a:spcAft>
-                <a:spcPts val="400"/>
-              </a:spcAft>
-            </a:pPr>
-            <a:r>
-              <a:rPr sz="1250" b="0">
-                <a:solidFill>
-                  <a:srgbClr val="1F2A3A"/>
-                </a:solidFill>
-                <a:latin typeface="맑은 고딕"/>
-                <a:ea typeface="맑은 고딕"/>
-                <a:cs typeface="맑은 고딕"/>
-              </a:rPr>
-              <a:t>단언으로 실제 결과를</a:t>
-            </a:r>
-          </a:p>
-          <a:p>
-            <a:pPr algn="ctr">
-              <a:lnSpc>
-                <a:spcPct val="110000"/>
-              </a:lnSpc>
-              <a:spcAft>
-                <a:spcPts val="400"/>
-              </a:spcAft>
-            </a:pPr>
-            <a:r>
-              <a:rPr sz="1250" b="0">
-                <a:solidFill>
-                  <a:srgbClr val="1F2A3A"/>
-                </a:solidFill>
-                <a:latin typeface="맑은 고딕"/>
-                <a:ea typeface="맑은 고딕"/>
-                <a:cs typeface="맑은 고딕"/>
-              </a:rPr>
-              <a:t>기대값과 견준다</a:t>
-            </a:r>
-          </a:p>
-        </p:txBody>
-      </p:sp>
-      <p:sp>
-        <p:nvSpPr>
-          <p:cNvPr id="20" name="Right Arrow 19"/>
-          <p:cNvSpPr/>
-          <p:nvPr/>
-        </p:nvSpPr>
-        <p:spPr>
-          <a:xfrm>
-            <a:off x="7115677" y="3854196"/>
-            <a:ext cx="256031" cy="274320"/>
-          </a:xfrm>
-          <a:prstGeom prst="rightArrow">
-            <a:avLst/>
-          </a:prstGeom>
-          <a:solidFill>
-            <a:srgbClr val="13294B"/>
-          </a:solidFill>
-          <a:ln>
-            <a:noFill/>
-          </a:ln>
-        </p:spPr>
-        <p:txBody>
-          <a:bodyPr rtlCol="0" anchor="ctr"/>
-          <a:lstStyle/>
-          <a:p>
-            <a:pPr algn="ctr"/>
-          </a:p>
-        </p:txBody>
-      </p:sp>
-      <p:sp>
-        <p:nvSpPr>
-          <p:cNvPr id="21" name="Rounded Rectangle 20"/>
-          <p:cNvSpPr/>
-          <p:nvPr/>
-        </p:nvSpPr>
-        <p:spPr>
-          <a:xfrm>
-            <a:off x="7435717" y="2626423"/>
-            <a:ext cx="1911644" cy="2729864"/>
-          </a:xfrm>
-          <a:prstGeom prst="roundRect">
-            <a:avLst>
-              <a:gd name="adj" fmla="val 5000"/>
-            </a:avLst>
-          </a:prstGeom>
-          <a:solidFill>
-            <a:srgbClr val="F3F6F9"/>
-          </a:solidFill>
-          <a:ln>
-            <a:noFill/>
-          </a:ln>
-        </p:spPr>
-        <p:txBody>
-          <a:bodyPr rtlCol="0" anchor="ctr"/>
-          <a:lstStyle/>
-          <a:p>
-            <a:pPr algn="ctr"/>
-          </a:p>
-        </p:txBody>
-      </p:sp>
-      <p:sp>
-        <p:nvSpPr>
-          <p:cNvPr id="22" name="Oval 21"/>
-          <p:cNvSpPr/>
-          <p:nvPr/>
-        </p:nvSpPr>
-        <p:spPr>
-          <a:xfrm>
-            <a:off x="8025780" y="2809303"/>
-            <a:ext cx="731520" cy="731520"/>
-          </a:xfrm>
-          <a:prstGeom prst="ellipse">
-            <a:avLst/>
-          </a:prstGeom>
-          <a:solidFill>
-            <a:srgbClr val="FFFFFF"/>
-          </a:solidFill>
-          <a:ln>
-            <a:noFill/>
-          </a:ln>
-        </p:spPr>
-        <p:txBody>
-          <a:bodyPr rtlCol="0" anchor="ctr"/>
-          <a:lstStyle/>
-          <a:p>
-            <a:pPr algn="ctr"/>
-          </a:p>
-        </p:txBody>
-      </p:sp>
-      <p:pic>
-        <p:nvPicPr>
-          <p:cNvPr id="23" name="아이콘:tool" descr="tool_13294B_1.6.png"/>
-          <p:cNvPicPr>
-            <a:picLocks noChangeAspect="1"/>
-          </p:cNvPicPr>
-          <p:nvPr/>
-        </p:nvPicPr>
-        <p:blipFill>
-          <a:blip r:embed="rId6"/>
-          <a:stretch>
-            <a:fillRect/>
-          </a:stretch>
-        </p:blipFill>
-        <p:spPr>
-          <a:xfrm>
-            <a:off x="8179399" y="2962922"/>
-            <a:ext cx="424281" cy="424281"/>
-          </a:xfrm>
-          <a:prstGeom prst="rect">
-            <a:avLst/>
-          </a:prstGeom>
-        </p:spPr>
-      </p:pic>
-      <p:sp>
-        <p:nvSpPr>
-          <p:cNvPr id="24" name="TextBox 23"/>
-          <p:cNvSpPr txBox="1"/>
-          <p:nvPr/>
-        </p:nvSpPr>
-        <p:spPr>
-          <a:xfrm>
-            <a:off x="7508869" y="3613975"/>
-            <a:ext cx="1765340" cy="1669160"/>
-          </a:xfrm>
-          <a:prstGeom prst="rect">
-            <a:avLst/>
-          </a:prstGeom>
-          <a:noFill/>
-        </p:spPr>
-        <p:txBody>
-          <a:bodyPr wrap="square" anchor="t"/>
-          <a:lstStyle/>
-          <a:p>
-            <a:pPr algn="ctr">
-              <a:lnSpc>
-                <a:spcPct val="110000"/>
-              </a:lnSpc>
-              <a:spcAft>
-                <a:spcPts val="400"/>
-              </a:spcAft>
-            </a:pPr>
-            <a:r>
-              <a:rPr sz="1550" b="1">
-                <a:solidFill>
-                  <a:srgbClr val="13294B"/>
-                </a:solidFill>
-                <a:latin typeface="맑은 고딕"/>
-                <a:ea typeface="맑은 고딕"/>
-                <a:cs typeface="맑은 고딕"/>
-              </a:rPr>
-              <a:t>원인과 수정</a:t>
-            </a:r>
-          </a:p>
-          <a:p>
-            <a:pPr algn="ctr">
-              <a:lnSpc>
-                <a:spcPct val="110000"/>
-              </a:lnSpc>
-              <a:spcAft>
-                <a:spcPts val="400"/>
-              </a:spcAft>
-            </a:pPr>
-            <a:r>
-              <a:rPr sz="1250" b="0">
-                <a:solidFill>
-                  <a:srgbClr val="1F2A3A"/>
-                </a:solidFill>
-                <a:latin typeface="맑은 고딕"/>
-                <a:ea typeface="맑은 고딕"/>
-                <a:cs typeface="맑은 고딕"/>
-              </a:rPr>
-              <a:t>지침, 지식, 명세, 코드</a:t>
-            </a:r>
-          </a:p>
-          <a:p>
-            <a:pPr algn="ctr">
-              <a:lnSpc>
-                <a:spcPct val="110000"/>
-              </a:lnSpc>
-              <a:spcAft>
-                <a:spcPts val="400"/>
-              </a:spcAft>
-            </a:pPr>
-            <a:r>
-              <a:rPr sz="1250" b="0">
-                <a:solidFill>
-                  <a:srgbClr val="1F2A3A"/>
-                </a:solidFill>
-                <a:latin typeface="맑은 고딕"/>
-                <a:ea typeface="맑은 고딕"/>
-                <a:cs typeface="맑은 고딕"/>
-              </a:rPr>
-              <a:t>가운데 고칠 곳</a:t>
-            </a:r>
-          </a:p>
-        </p:txBody>
-      </p:sp>
-      <p:sp>
-        <p:nvSpPr>
-          <p:cNvPr id="25" name="Right Arrow 24"/>
-          <p:cNvSpPr/>
-          <p:nvPr/>
-        </p:nvSpPr>
-        <p:spPr>
-          <a:xfrm>
-            <a:off x="9411370" y="3854196"/>
-            <a:ext cx="256031" cy="274320"/>
-          </a:xfrm>
-          <a:prstGeom prst="rightArrow">
-            <a:avLst/>
-          </a:prstGeom>
-          <a:solidFill>
-            <a:srgbClr val="13294B"/>
-          </a:solidFill>
-          <a:ln>
-            <a:noFill/>
-          </a:ln>
-        </p:spPr>
-        <p:txBody>
-          <a:bodyPr rtlCol="0" anchor="ctr"/>
-          <a:lstStyle/>
-          <a:p>
-            <a:pPr algn="ctr"/>
-          </a:p>
-        </p:txBody>
-      </p:sp>
-      <p:sp>
-        <p:nvSpPr>
-          <p:cNvPr id="26" name="Rounded Rectangle 25"/>
-          <p:cNvSpPr/>
-          <p:nvPr/>
-        </p:nvSpPr>
-        <p:spPr>
-          <a:xfrm>
-            <a:off x="9731410" y="2626423"/>
-            <a:ext cx="1911644" cy="2729864"/>
-          </a:xfrm>
-          <a:prstGeom prst="roundRect">
-            <a:avLst>
-              <a:gd name="adj" fmla="val 5000"/>
-            </a:avLst>
-          </a:prstGeom>
-          <a:solidFill>
-            <a:srgbClr val="E7F3FD"/>
-          </a:solidFill>
-          <a:ln w="25400">
-            <a:solidFill>
-              <a:srgbClr val="5CB8F2"/>
-            </a:solidFill>
-          </a:ln>
-        </p:spPr>
-        <p:txBody>
-          <a:bodyPr rtlCol="0" anchor="ctr"/>
-          <a:lstStyle/>
-          <a:p>
-            <a:pPr algn="ctr"/>
-          </a:p>
-        </p:txBody>
-      </p:sp>
-      <p:sp>
-        <p:nvSpPr>
-          <p:cNvPr id="27" name="Oval 26"/>
-          <p:cNvSpPr/>
-          <p:nvPr/>
-        </p:nvSpPr>
-        <p:spPr>
-          <a:xfrm>
-            <a:off x="10321472" y="2809303"/>
-            <a:ext cx="731520" cy="731520"/>
-          </a:xfrm>
-          <a:prstGeom prst="ellipse">
-            <a:avLst/>
-          </a:prstGeom>
-          <a:solidFill>
-            <a:srgbClr val="5CB8F2"/>
-          </a:solidFill>
-          <a:ln>
-            <a:noFill/>
-          </a:ln>
-        </p:spPr>
-        <p:txBody>
-          <a:bodyPr rtlCol="0" anchor="ctr"/>
-          <a:lstStyle/>
-          <a:p>
-            <a:pPr algn="ctr"/>
-          </a:p>
-        </p:txBody>
-      </p:sp>
-      <p:pic>
-        <p:nvPicPr>
-          <p:cNvPr id="28" name="아이콘:repeat" descr="repeat_13294B_1.6.png"/>
-          <p:cNvPicPr>
-            <a:picLocks noChangeAspect="1"/>
-          </p:cNvPicPr>
-          <p:nvPr/>
-        </p:nvPicPr>
-        <p:blipFill>
-          <a:blip r:embed="rId7"/>
-          <a:stretch>
-            <a:fillRect/>
-          </a:stretch>
-        </p:blipFill>
-        <p:spPr>
-          <a:xfrm>
-            <a:off x="10475092" y="2962922"/>
-            <a:ext cx="424281" cy="424281"/>
-          </a:xfrm>
-          <a:prstGeom prst="rect">
-            <a:avLst/>
-          </a:prstGeom>
-        </p:spPr>
-      </p:pic>
-      <p:sp>
-        <p:nvSpPr>
-          <p:cNvPr id="29" name="TextBox 28"/>
-          <p:cNvSpPr txBox="1"/>
-          <p:nvPr/>
-        </p:nvSpPr>
-        <p:spPr>
-          <a:xfrm>
-            <a:off x="9804562" y="3613975"/>
-            <a:ext cx="1765340" cy="1669160"/>
-          </a:xfrm>
-          <a:prstGeom prst="rect">
-            <a:avLst/>
-          </a:prstGeom>
-          <a:noFill/>
-        </p:spPr>
-        <p:txBody>
-          <a:bodyPr wrap="square" anchor="t"/>
-          <a:lstStyle/>
-          <a:p>
-            <a:pPr algn="ctr">
-              <a:lnSpc>
-                <a:spcPct val="110000"/>
-              </a:lnSpc>
-              <a:spcAft>
-                <a:spcPts val="400"/>
-              </a:spcAft>
-            </a:pPr>
-            <a:r>
-              <a:rPr sz="1550" b="1">
-                <a:solidFill>
-                  <a:srgbClr val="13294B"/>
-                </a:solidFill>
-                <a:latin typeface="맑은 고딕"/>
-                <a:ea typeface="맑은 고딕"/>
-                <a:cs typeface="맑은 고딕"/>
-              </a:rPr>
-              <a:t>전체 회귀</a:t>
-            </a:r>
-          </a:p>
-          <a:p>
-            <a:pPr algn="ctr">
-              <a:lnSpc>
-                <a:spcPct val="110000"/>
-              </a:lnSpc>
-              <a:spcAft>
-                <a:spcPts val="400"/>
-              </a:spcAft>
-            </a:pPr>
-            <a:r>
-              <a:rPr sz="1250" b="0">
-                <a:solidFill>
-                  <a:srgbClr val="1F2A3A"/>
-                </a:solidFill>
-                <a:latin typeface="맑은 고딕"/>
-                <a:ea typeface="맑은 고딕"/>
-                <a:cs typeface="맑은 고딕"/>
-              </a:rPr>
-              <a:t>기존 시나리오를</a:t>
-            </a:r>
-          </a:p>
-          <a:p>
-            <a:pPr algn="ctr">
-              <a:lnSpc>
-                <a:spcPct val="110000"/>
-              </a:lnSpc>
-              <a:spcAft>
-                <a:spcPts val="400"/>
-              </a:spcAft>
-            </a:pPr>
-            <a:r>
-              <a:rPr sz="1250" b="0">
-                <a:solidFill>
-                  <a:srgbClr val="1F2A3A"/>
-                </a:solidFill>
-                <a:latin typeface="맑은 고딕"/>
-                <a:ea typeface="맑은 고딕"/>
-                <a:cs typeface="맑은 고딕"/>
-              </a:rPr>
-              <a:t>모두 다시 실행한다</a:t>
+              <a:t>한 출처가 실패하면 읽힌 값만 주고, 실패한 출처와 그 사유를 함께 알린다.</a:t>
             </a:r>
           </a:p>
         </p:txBody>
@@ -26960,6 +26427,1136 @@
     <p:bg>
       <p:bgPr>
         <a:solidFill>
+          <a:srgbClr val="FFFFFF"/>
+        </a:solidFill>
+        <a:effectLst/>
+      </p:bgPr>
+    </p:bg>
+    <p:spTree>
+      <p:nvGrpSpPr>
+        <p:cNvPr id="1" name=""/>
+        <p:cNvGrpSpPr/>
+        <p:nvPr/>
+      </p:nvGrpSpPr>
+      <p:grpSpPr/>
+      <p:sp>
+        <p:nvSpPr>
+          <p:cNvPr id="2" name="TextBox 1"/>
+          <p:cNvSpPr txBox="1"/>
+          <p:nvPr/>
+        </p:nvSpPr>
+        <p:spPr>
+          <a:xfrm>
+            <a:off x="457200" y="329184"/>
+            <a:ext cx="11277295" cy="603504"/>
+          </a:xfrm>
+          <a:prstGeom prst="rect">
+            <a:avLst/>
+          </a:prstGeom>
+          <a:noFill/>
+        </p:spPr>
+        <p:txBody>
+          <a:bodyPr wrap="square" anchor="ctr"/>
+          <a:lstStyle/>
+          <a:p>
+            <a:pPr algn="l">
+              <a:lnSpc>
+                <a:spcPct val="110000"/>
+              </a:lnSpc>
+            </a:pPr>
+            <a:r>
+              <a:rPr sz="2800" b="1">
+                <a:solidFill>
+                  <a:srgbClr val="13294B"/>
+                </a:solidFill>
+                <a:latin typeface="맑은 고딕"/>
+                <a:ea typeface="맑은 고딕"/>
+                <a:cs typeface="맑은 고딕"/>
+              </a:rPr>
+              <a:t>단원 정리: 검증의 한 바퀴</a:t>
+            </a:r>
+          </a:p>
+        </p:txBody>
+      </p:sp>
+      <p:sp>
+        <p:nvSpPr>
+          <p:cNvPr id="3" name="TextBox 2"/>
+          <p:cNvSpPr txBox="1"/>
+          <p:nvPr/>
+        </p:nvSpPr>
+        <p:spPr>
+          <a:xfrm>
+            <a:off x="457200" y="932688"/>
+            <a:ext cx="11277295" cy="420624"/>
+          </a:xfrm>
+          <a:prstGeom prst="rect">
+            <a:avLst/>
+          </a:prstGeom>
+          <a:noFill/>
+        </p:spPr>
+        <p:txBody>
+          <a:bodyPr wrap="square" anchor="ctr"/>
+          <a:lstStyle/>
+          <a:p>
+            <a:pPr algn="l">
+              <a:lnSpc>
+                <a:spcPct val="110000"/>
+              </a:lnSpc>
+            </a:pPr>
+            <a:r>
+              <a:rPr sz="1600" b="0">
+                <a:solidFill>
+                  <a:srgbClr val="556175"/>
+                </a:solidFill>
+                <a:latin typeface="맑은 고딕"/>
+                <a:ea typeface="맑은 고딕"/>
+                <a:cs typeface="맑은 고딕"/>
+              </a:rPr>
+              <a:t>명세에서 시나리오를 만들어 실행하고, 실패를 고친 뒤 전체를 다시 실행하는 한 바퀴가 요구가 바뀔 때마다 돈다.</a:t>
+            </a:r>
+          </a:p>
+        </p:txBody>
+      </p:sp>
+      <p:sp>
+        <p:nvSpPr>
+          <p:cNvPr id="4" name="Rectangle 3"/>
+          <p:cNvSpPr/>
+          <p:nvPr/>
+        </p:nvSpPr>
+        <p:spPr>
+          <a:xfrm>
+            <a:off x="548640" y="1408176"/>
+            <a:ext cx="11094415" cy="18288"/>
+          </a:xfrm>
+          <a:prstGeom prst="rect">
+            <a:avLst/>
+          </a:prstGeom>
+          <a:solidFill>
+            <a:srgbClr val="D3D9E1"/>
+          </a:solidFill>
+          <a:ln>
+            <a:noFill/>
+          </a:ln>
+        </p:spPr>
+        <p:txBody>
+          <a:bodyPr rtlCol="0" anchor="ctr"/>
+          <a:lstStyle/>
+          <a:p>
+            <a:pPr algn="ctr"/>
+          </a:p>
+        </p:txBody>
+      </p:sp>
+      <p:sp>
+        <p:nvSpPr>
+          <p:cNvPr id="5" name="TextBox 4"/>
+          <p:cNvSpPr txBox="1"/>
+          <p:nvPr/>
+        </p:nvSpPr>
+        <p:spPr>
+          <a:xfrm>
+            <a:off x="10911535" y="6473952"/>
+            <a:ext cx="822960" cy="274320"/>
+          </a:xfrm>
+          <a:prstGeom prst="rect">
+            <a:avLst/>
+          </a:prstGeom>
+          <a:noFill/>
+        </p:spPr>
+        <p:txBody>
+          <a:bodyPr wrap="square" anchor="t"/>
+          <a:lstStyle/>
+          <a:p>
+            <a:pPr algn="r">
+              <a:lnSpc>
+                <a:spcPct val="110000"/>
+              </a:lnSpc>
+            </a:pPr>
+            <a:r>
+              <a:rPr sz="1000" b="0">
+                <a:solidFill>
+                  <a:srgbClr val="556175"/>
+                </a:solidFill>
+                <a:latin typeface="맑은 고딕"/>
+                <a:ea typeface="맑은 고딕"/>
+                <a:cs typeface="맑은 고딕"/>
+              </a:rPr>
+              <a:t>30</a:t>
+            </a:r>
+          </a:p>
+        </p:txBody>
+      </p:sp>
+      <p:sp>
+        <p:nvSpPr>
+          <p:cNvPr id="6" name="Rounded Rectangle 5"/>
+          <p:cNvSpPr/>
+          <p:nvPr/>
+        </p:nvSpPr>
+        <p:spPr>
+          <a:xfrm>
+            <a:off x="548640" y="2626423"/>
+            <a:ext cx="1911644" cy="2729864"/>
+          </a:xfrm>
+          <a:prstGeom prst="roundRect">
+            <a:avLst>
+              <a:gd name="adj" fmla="val 5000"/>
+            </a:avLst>
+          </a:prstGeom>
+          <a:solidFill>
+            <a:srgbClr val="F3F6F9"/>
+          </a:solidFill>
+          <a:ln>
+            <a:noFill/>
+          </a:ln>
+        </p:spPr>
+        <p:txBody>
+          <a:bodyPr rtlCol="0" anchor="ctr"/>
+          <a:lstStyle/>
+          <a:p>
+            <a:pPr algn="ctr"/>
+          </a:p>
+        </p:txBody>
+      </p:sp>
+      <p:sp>
+        <p:nvSpPr>
+          <p:cNvPr id="7" name="Oval 6"/>
+          <p:cNvSpPr/>
+          <p:nvPr/>
+        </p:nvSpPr>
+        <p:spPr>
+          <a:xfrm>
+            <a:off x="1138702" y="2809303"/>
+            <a:ext cx="731520" cy="731520"/>
+          </a:xfrm>
+          <a:prstGeom prst="ellipse">
+            <a:avLst/>
+          </a:prstGeom>
+          <a:solidFill>
+            <a:srgbClr val="FFFFFF"/>
+          </a:solidFill>
+          <a:ln>
+            <a:noFill/>
+          </a:ln>
+        </p:spPr>
+        <p:txBody>
+          <a:bodyPr rtlCol="0" anchor="ctr"/>
+          <a:lstStyle/>
+          <a:p>
+            <a:pPr algn="ctr"/>
+          </a:p>
+        </p:txBody>
+      </p:sp>
+      <p:pic>
+        <p:nvPicPr>
+          <p:cNvPr id="8" name="아이콘:file-text" descr="file-text_13294B_1.6.png"/>
+          <p:cNvPicPr>
+            <a:picLocks noChangeAspect="1"/>
+          </p:cNvPicPr>
+          <p:nvPr/>
+        </p:nvPicPr>
+        <p:blipFill>
+          <a:blip r:embed="rId3"/>
+          <a:stretch>
+            <a:fillRect/>
+          </a:stretch>
+        </p:blipFill>
+        <p:spPr>
+          <a:xfrm>
+            <a:off x="1292321" y="2962922"/>
+            <a:ext cx="424281" cy="424281"/>
+          </a:xfrm>
+          <a:prstGeom prst="rect">
+            <a:avLst/>
+          </a:prstGeom>
+        </p:spPr>
+      </p:pic>
+      <p:sp>
+        <p:nvSpPr>
+          <p:cNvPr id="9" name="TextBox 8"/>
+          <p:cNvSpPr txBox="1"/>
+          <p:nvPr/>
+        </p:nvSpPr>
+        <p:spPr>
+          <a:xfrm>
+            <a:off x="621792" y="3613975"/>
+            <a:ext cx="1765340" cy="1669160"/>
+          </a:xfrm>
+          <a:prstGeom prst="rect">
+            <a:avLst/>
+          </a:prstGeom>
+          <a:noFill/>
+        </p:spPr>
+        <p:txBody>
+          <a:bodyPr wrap="square" anchor="t"/>
+          <a:lstStyle/>
+          <a:p>
+            <a:pPr algn="ctr">
+              <a:lnSpc>
+                <a:spcPct val="110000"/>
+              </a:lnSpc>
+              <a:spcAft>
+                <a:spcPts val="400"/>
+              </a:spcAft>
+            </a:pPr>
+            <a:r>
+              <a:rPr sz="1550" b="1">
+                <a:solidFill>
+                  <a:srgbClr val="13294B"/>
+                </a:solidFill>
+                <a:latin typeface="맑은 고딕"/>
+                <a:ea typeface="맑은 고딕"/>
+                <a:cs typeface="맑은 고딕"/>
+              </a:rPr>
+              <a:t>명세</a:t>
+            </a:r>
+          </a:p>
+          <a:p>
+            <a:pPr algn="ctr">
+              <a:lnSpc>
+                <a:spcPct val="110000"/>
+              </a:lnSpc>
+              <a:spcAft>
+                <a:spcPts val="400"/>
+              </a:spcAft>
+            </a:pPr>
+            <a:r>
+              <a:rPr sz="1250" b="0">
+                <a:solidFill>
+                  <a:srgbClr val="1F2A3A"/>
+                </a:solidFill>
+                <a:latin typeface="맑은 고딕"/>
+                <a:ea typeface="맑은 고딕"/>
+                <a:cs typeface="맑은 고딕"/>
+              </a:rPr>
+              <a:t>계약, 금지 조건,</a:t>
+            </a:r>
+          </a:p>
+          <a:p>
+            <a:pPr algn="ctr">
+              <a:lnSpc>
+                <a:spcPct val="110000"/>
+              </a:lnSpc>
+              <a:spcAft>
+                <a:spcPts val="400"/>
+              </a:spcAft>
+            </a:pPr>
+            <a:r>
+              <a:rPr sz="1250" b="0">
+                <a:solidFill>
+                  <a:srgbClr val="1F2A3A"/>
+                </a:solidFill>
+                <a:latin typeface="맑은 고딕"/>
+                <a:ea typeface="맑은 고딕"/>
+                <a:cs typeface="맑은 고딕"/>
+              </a:rPr>
+              <a:t>수용 기준</a:t>
+            </a:r>
+          </a:p>
+        </p:txBody>
+      </p:sp>
+      <p:sp>
+        <p:nvSpPr>
+          <p:cNvPr id="10" name="Right Arrow 9"/>
+          <p:cNvSpPr/>
+          <p:nvPr/>
+        </p:nvSpPr>
+        <p:spPr>
+          <a:xfrm>
+            <a:off x="2524292" y="3854196"/>
+            <a:ext cx="256031" cy="274320"/>
+          </a:xfrm>
+          <a:prstGeom prst="rightArrow">
+            <a:avLst/>
+          </a:prstGeom>
+          <a:solidFill>
+            <a:srgbClr val="13294B"/>
+          </a:solidFill>
+          <a:ln>
+            <a:noFill/>
+          </a:ln>
+        </p:spPr>
+        <p:txBody>
+          <a:bodyPr rtlCol="0" anchor="ctr"/>
+          <a:lstStyle/>
+          <a:p>
+            <a:pPr algn="ctr"/>
+          </a:p>
+        </p:txBody>
+      </p:sp>
+      <p:sp>
+        <p:nvSpPr>
+          <p:cNvPr id="11" name="Rounded Rectangle 10"/>
+          <p:cNvSpPr/>
+          <p:nvPr/>
+        </p:nvSpPr>
+        <p:spPr>
+          <a:xfrm>
+            <a:off x="2844332" y="2626423"/>
+            <a:ext cx="1911644" cy="2729864"/>
+          </a:xfrm>
+          <a:prstGeom prst="roundRect">
+            <a:avLst>
+              <a:gd name="adj" fmla="val 5000"/>
+            </a:avLst>
+          </a:prstGeom>
+          <a:solidFill>
+            <a:srgbClr val="F3F6F9"/>
+          </a:solidFill>
+          <a:ln>
+            <a:noFill/>
+          </a:ln>
+        </p:spPr>
+        <p:txBody>
+          <a:bodyPr rtlCol="0" anchor="ctr"/>
+          <a:lstStyle/>
+          <a:p>
+            <a:pPr algn="ctr"/>
+          </a:p>
+        </p:txBody>
+      </p:sp>
+      <p:sp>
+        <p:nvSpPr>
+          <p:cNvPr id="12" name="Oval 11"/>
+          <p:cNvSpPr/>
+          <p:nvPr/>
+        </p:nvSpPr>
+        <p:spPr>
+          <a:xfrm>
+            <a:off x="3434394" y="2809303"/>
+            <a:ext cx="731520" cy="731520"/>
+          </a:xfrm>
+          <a:prstGeom prst="ellipse">
+            <a:avLst/>
+          </a:prstGeom>
+          <a:solidFill>
+            <a:srgbClr val="FFFFFF"/>
+          </a:solidFill>
+          <a:ln>
+            <a:noFill/>
+          </a:ln>
+        </p:spPr>
+        <p:txBody>
+          <a:bodyPr rtlCol="0" anchor="ctr"/>
+          <a:lstStyle/>
+          <a:p>
+            <a:pPr algn="ctr"/>
+          </a:p>
+        </p:txBody>
+      </p:sp>
+      <p:pic>
+        <p:nvPicPr>
+          <p:cNvPr id="13" name="아이콘:checklist" descr="checklist_13294B_1.6.png"/>
+          <p:cNvPicPr>
+            <a:picLocks noChangeAspect="1"/>
+          </p:cNvPicPr>
+          <p:nvPr/>
+        </p:nvPicPr>
+        <p:blipFill>
+          <a:blip r:embed="rId4"/>
+          <a:stretch>
+            <a:fillRect/>
+          </a:stretch>
+        </p:blipFill>
+        <p:spPr>
+          <a:xfrm>
+            <a:off x="3588014" y="2962922"/>
+            <a:ext cx="424281" cy="424281"/>
+          </a:xfrm>
+          <a:prstGeom prst="rect">
+            <a:avLst/>
+          </a:prstGeom>
+        </p:spPr>
+      </p:pic>
+      <p:sp>
+        <p:nvSpPr>
+          <p:cNvPr id="14" name="TextBox 13"/>
+          <p:cNvSpPr txBox="1"/>
+          <p:nvPr/>
+        </p:nvSpPr>
+        <p:spPr>
+          <a:xfrm>
+            <a:off x="2917484" y="3613975"/>
+            <a:ext cx="1765340" cy="1669160"/>
+          </a:xfrm>
+          <a:prstGeom prst="rect">
+            <a:avLst/>
+          </a:prstGeom>
+          <a:noFill/>
+        </p:spPr>
+        <p:txBody>
+          <a:bodyPr wrap="square" anchor="t"/>
+          <a:lstStyle/>
+          <a:p>
+            <a:pPr algn="ctr">
+              <a:lnSpc>
+                <a:spcPct val="110000"/>
+              </a:lnSpc>
+              <a:spcAft>
+                <a:spcPts val="400"/>
+              </a:spcAft>
+            </a:pPr>
+            <a:r>
+              <a:rPr sz="1550" b="1">
+                <a:solidFill>
+                  <a:srgbClr val="13294B"/>
+                </a:solidFill>
+                <a:latin typeface="맑은 고딕"/>
+                <a:ea typeface="맑은 고딕"/>
+                <a:cs typeface="맑은 고딕"/>
+              </a:rPr>
+              <a:t>시나리오</a:t>
+            </a:r>
+          </a:p>
+          <a:p>
+            <a:pPr algn="ctr">
+              <a:lnSpc>
+                <a:spcPct val="110000"/>
+              </a:lnSpc>
+              <a:spcAft>
+                <a:spcPts val="400"/>
+              </a:spcAft>
+            </a:pPr>
+            <a:r>
+              <a:rPr sz="1250" b="0">
+                <a:solidFill>
+                  <a:srgbClr val="1F2A3A"/>
+                </a:solidFill>
+                <a:latin typeface="맑은 고딕"/>
+                <a:ea typeface="맑은 고딕"/>
+                <a:cs typeface="맑은 고딕"/>
+              </a:rPr>
+              <a:t>Given · When · Then,</a:t>
+            </a:r>
+          </a:p>
+          <a:p>
+            <a:pPr algn="ctr">
+              <a:lnSpc>
+                <a:spcPct val="110000"/>
+              </a:lnSpc>
+              <a:spcAft>
+                <a:spcPts val="400"/>
+              </a:spcAft>
+            </a:pPr>
+            <a:r>
+              <a:rPr sz="1250" b="0">
+                <a:solidFill>
+                  <a:srgbClr val="1F2A3A"/>
+                </a:solidFill>
+                <a:latin typeface="맑은 고딕"/>
+                <a:ea typeface="맑은 고딕"/>
+                <a:cs typeface="맑은 고딕"/>
+              </a:rPr>
+              <a:t>입력값과 기대값</a:t>
+            </a:r>
+          </a:p>
+        </p:txBody>
+      </p:sp>
+      <p:sp>
+        <p:nvSpPr>
+          <p:cNvPr id="15" name="Right Arrow 14"/>
+          <p:cNvSpPr/>
+          <p:nvPr/>
+        </p:nvSpPr>
+        <p:spPr>
+          <a:xfrm>
+            <a:off x="4819985" y="3854196"/>
+            <a:ext cx="256031" cy="274320"/>
+          </a:xfrm>
+          <a:prstGeom prst="rightArrow">
+            <a:avLst/>
+          </a:prstGeom>
+          <a:solidFill>
+            <a:srgbClr val="13294B"/>
+          </a:solidFill>
+          <a:ln>
+            <a:noFill/>
+          </a:ln>
+        </p:spPr>
+        <p:txBody>
+          <a:bodyPr rtlCol="0" anchor="ctr"/>
+          <a:lstStyle/>
+          <a:p>
+            <a:pPr algn="ctr"/>
+          </a:p>
+        </p:txBody>
+      </p:sp>
+      <p:sp>
+        <p:nvSpPr>
+          <p:cNvPr id="16" name="Rounded Rectangle 15"/>
+          <p:cNvSpPr/>
+          <p:nvPr/>
+        </p:nvSpPr>
+        <p:spPr>
+          <a:xfrm>
+            <a:off x="5140025" y="2626423"/>
+            <a:ext cx="1911644" cy="2729864"/>
+          </a:xfrm>
+          <a:prstGeom prst="roundRect">
+            <a:avLst>
+              <a:gd name="adj" fmla="val 5000"/>
+            </a:avLst>
+          </a:prstGeom>
+          <a:solidFill>
+            <a:srgbClr val="F3F6F9"/>
+          </a:solidFill>
+          <a:ln>
+            <a:noFill/>
+          </a:ln>
+        </p:spPr>
+        <p:txBody>
+          <a:bodyPr rtlCol="0" anchor="ctr"/>
+          <a:lstStyle/>
+          <a:p>
+            <a:pPr algn="ctr"/>
+          </a:p>
+        </p:txBody>
+      </p:sp>
+      <p:sp>
+        <p:nvSpPr>
+          <p:cNvPr id="17" name="Oval 16"/>
+          <p:cNvSpPr/>
+          <p:nvPr/>
+        </p:nvSpPr>
+        <p:spPr>
+          <a:xfrm>
+            <a:off x="5730087" y="2809303"/>
+            <a:ext cx="731520" cy="731520"/>
+          </a:xfrm>
+          <a:prstGeom prst="ellipse">
+            <a:avLst/>
+          </a:prstGeom>
+          <a:solidFill>
+            <a:srgbClr val="FFFFFF"/>
+          </a:solidFill>
+          <a:ln>
+            <a:noFill/>
+          </a:ln>
+        </p:spPr>
+        <p:txBody>
+          <a:bodyPr rtlCol="0" anchor="ctr"/>
+          <a:lstStyle/>
+          <a:p>
+            <a:pPr algn="ctr"/>
+          </a:p>
+        </p:txBody>
+      </p:sp>
+      <p:pic>
+        <p:nvPicPr>
+          <p:cNvPr id="18" name="아이콘:player-play" descr="player-play_13294B_1.6.png"/>
+          <p:cNvPicPr>
+            <a:picLocks noChangeAspect="1"/>
+          </p:cNvPicPr>
+          <p:nvPr/>
+        </p:nvPicPr>
+        <p:blipFill>
+          <a:blip r:embed="rId5"/>
+          <a:stretch>
+            <a:fillRect/>
+          </a:stretch>
+        </p:blipFill>
+        <p:spPr>
+          <a:xfrm>
+            <a:off x="5883706" y="2962922"/>
+            <a:ext cx="424281" cy="424281"/>
+          </a:xfrm>
+          <a:prstGeom prst="rect">
+            <a:avLst/>
+          </a:prstGeom>
+        </p:spPr>
+      </p:pic>
+      <p:sp>
+        <p:nvSpPr>
+          <p:cNvPr id="19" name="TextBox 18"/>
+          <p:cNvSpPr txBox="1"/>
+          <p:nvPr/>
+        </p:nvSpPr>
+        <p:spPr>
+          <a:xfrm>
+            <a:off x="5213177" y="3613975"/>
+            <a:ext cx="1765340" cy="1669160"/>
+          </a:xfrm>
+          <a:prstGeom prst="rect">
+            <a:avLst/>
+          </a:prstGeom>
+          <a:noFill/>
+        </p:spPr>
+        <p:txBody>
+          <a:bodyPr wrap="square" anchor="t"/>
+          <a:lstStyle/>
+          <a:p>
+            <a:pPr algn="ctr">
+              <a:lnSpc>
+                <a:spcPct val="110000"/>
+              </a:lnSpc>
+              <a:spcAft>
+                <a:spcPts val="400"/>
+              </a:spcAft>
+            </a:pPr>
+            <a:r>
+              <a:rPr sz="1550" b="1">
+                <a:solidFill>
+                  <a:srgbClr val="13294B"/>
+                </a:solidFill>
+                <a:latin typeface="맑은 고딕"/>
+                <a:ea typeface="맑은 고딕"/>
+                <a:cs typeface="맑은 고딕"/>
+              </a:rPr>
+              <a:t>실행과 대조</a:t>
+            </a:r>
+          </a:p>
+          <a:p>
+            <a:pPr algn="ctr">
+              <a:lnSpc>
+                <a:spcPct val="110000"/>
+              </a:lnSpc>
+              <a:spcAft>
+                <a:spcPts val="400"/>
+              </a:spcAft>
+            </a:pPr>
+            <a:r>
+              <a:rPr sz="1250" b="0">
+                <a:solidFill>
+                  <a:srgbClr val="1F2A3A"/>
+                </a:solidFill>
+                <a:latin typeface="맑은 고딕"/>
+                <a:ea typeface="맑은 고딕"/>
+                <a:cs typeface="맑은 고딕"/>
+              </a:rPr>
+              <a:t>단언으로 실제 결과를</a:t>
+            </a:r>
+          </a:p>
+          <a:p>
+            <a:pPr algn="ctr">
+              <a:lnSpc>
+                <a:spcPct val="110000"/>
+              </a:lnSpc>
+              <a:spcAft>
+                <a:spcPts val="400"/>
+              </a:spcAft>
+            </a:pPr>
+            <a:r>
+              <a:rPr sz="1250" b="0">
+                <a:solidFill>
+                  <a:srgbClr val="1F2A3A"/>
+                </a:solidFill>
+                <a:latin typeface="맑은 고딕"/>
+                <a:ea typeface="맑은 고딕"/>
+                <a:cs typeface="맑은 고딕"/>
+              </a:rPr>
+              <a:t>기대값과 견준다</a:t>
+            </a:r>
+          </a:p>
+        </p:txBody>
+      </p:sp>
+      <p:sp>
+        <p:nvSpPr>
+          <p:cNvPr id="20" name="Right Arrow 19"/>
+          <p:cNvSpPr/>
+          <p:nvPr/>
+        </p:nvSpPr>
+        <p:spPr>
+          <a:xfrm>
+            <a:off x="7115677" y="3854196"/>
+            <a:ext cx="256031" cy="274320"/>
+          </a:xfrm>
+          <a:prstGeom prst="rightArrow">
+            <a:avLst/>
+          </a:prstGeom>
+          <a:solidFill>
+            <a:srgbClr val="13294B"/>
+          </a:solidFill>
+          <a:ln>
+            <a:noFill/>
+          </a:ln>
+        </p:spPr>
+        <p:txBody>
+          <a:bodyPr rtlCol="0" anchor="ctr"/>
+          <a:lstStyle/>
+          <a:p>
+            <a:pPr algn="ctr"/>
+          </a:p>
+        </p:txBody>
+      </p:sp>
+      <p:sp>
+        <p:nvSpPr>
+          <p:cNvPr id="21" name="Rounded Rectangle 20"/>
+          <p:cNvSpPr/>
+          <p:nvPr/>
+        </p:nvSpPr>
+        <p:spPr>
+          <a:xfrm>
+            <a:off x="7435717" y="2626423"/>
+            <a:ext cx="1911644" cy="2729864"/>
+          </a:xfrm>
+          <a:prstGeom prst="roundRect">
+            <a:avLst>
+              <a:gd name="adj" fmla="val 5000"/>
+            </a:avLst>
+          </a:prstGeom>
+          <a:solidFill>
+            <a:srgbClr val="F3F6F9"/>
+          </a:solidFill>
+          <a:ln>
+            <a:noFill/>
+          </a:ln>
+        </p:spPr>
+        <p:txBody>
+          <a:bodyPr rtlCol="0" anchor="ctr"/>
+          <a:lstStyle/>
+          <a:p>
+            <a:pPr algn="ctr"/>
+          </a:p>
+        </p:txBody>
+      </p:sp>
+      <p:sp>
+        <p:nvSpPr>
+          <p:cNvPr id="22" name="Oval 21"/>
+          <p:cNvSpPr/>
+          <p:nvPr/>
+        </p:nvSpPr>
+        <p:spPr>
+          <a:xfrm>
+            <a:off x="8025780" y="2809303"/>
+            <a:ext cx="731520" cy="731520"/>
+          </a:xfrm>
+          <a:prstGeom prst="ellipse">
+            <a:avLst/>
+          </a:prstGeom>
+          <a:solidFill>
+            <a:srgbClr val="FFFFFF"/>
+          </a:solidFill>
+          <a:ln>
+            <a:noFill/>
+          </a:ln>
+        </p:spPr>
+        <p:txBody>
+          <a:bodyPr rtlCol="0" anchor="ctr"/>
+          <a:lstStyle/>
+          <a:p>
+            <a:pPr algn="ctr"/>
+          </a:p>
+        </p:txBody>
+      </p:sp>
+      <p:pic>
+        <p:nvPicPr>
+          <p:cNvPr id="23" name="아이콘:tool" descr="tool_13294B_1.6.png"/>
+          <p:cNvPicPr>
+            <a:picLocks noChangeAspect="1"/>
+          </p:cNvPicPr>
+          <p:nvPr/>
+        </p:nvPicPr>
+        <p:blipFill>
+          <a:blip r:embed="rId6"/>
+          <a:stretch>
+            <a:fillRect/>
+          </a:stretch>
+        </p:blipFill>
+        <p:spPr>
+          <a:xfrm>
+            <a:off x="8179399" y="2962922"/>
+            <a:ext cx="424281" cy="424281"/>
+          </a:xfrm>
+          <a:prstGeom prst="rect">
+            <a:avLst/>
+          </a:prstGeom>
+        </p:spPr>
+      </p:pic>
+      <p:sp>
+        <p:nvSpPr>
+          <p:cNvPr id="24" name="TextBox 23"/>
+          <p:cNvSpPr txBox="1"/>
+          <p:nvPr/>
+        </p:nvSpPr>
+        <p:spPr>
+          <a:xfrm>
+            <a:off x="7508869" y="3613975"/>
+            <a:ext cx="1765340" cy="1669160"/>
+          </a:xfrm>
+          <a:prstGeom prst="rect">
+            <a:avLst/>
+          </a:prstGeom>
+          <a:noFill/>
+        </p:spPr>
+        <p:txBody>
+          <a:bodyPr wrap="square" anchor="t"/>
+          <a:lstStyle/>
+          <a:p>
+            <a:pPr algn="ctr">
+              <a:lnSpc>
+                <a:spcPct val="110000"/>
+              </a:lnSpc>
+              <a:spcAft>
+                <a:spcPts val="400"/>
+              </a:spcAft>
+            </a:pPr>
+            <a:r>
+              <a:rPr sz="1550" b="1">
+                <a:solidFill>
+                  <a:srgbClr val="13294B"/>
+                </a:solidFill>
+                <a:latin typeface="맑은 고딕"/>
+                <a:ea typeface="맑은 고딕"/>
+                <a:cs typeface="맑은 고딕"/>
+              </a:rPr>
+              <a:t>원인과 수정</a:t>
+            </a:r>
+          </a:p>
+          <a:p>
+            <a:pPr algn="ctr">
+              <a:lnSpc>
+                <a:spcPct val="110000"/>
+              </a:lnSpc>
+              <a:spcAft>
+                <a:spcPts val="400"/>
+              </a:spcAft>
+            </a:pPr>
+            <a:r>
+              <a:rPr sz="1250" b="0">
+                <a:solidFill>
+                  <a:srgbClr val="1F2A3A"/>
+                </a:solidFill>
+                <a:latin typeface="맑은 고딕"/>
+                <a:ea typeface="맑은 고딕"/>
+                <a:cs typeface="맑은 고딕"/>
+              </a:rPr>
+              <a:t>지침, 지식, 명세, 코드</a:t>
+            </a:r>
+          </a:p>
+          <a:p>
+            <a:pPr algn="ctr">
+              <a:lnSpc>
+                <a:spcPct val="110000"/>
+              </a:lnSpc>
+              <a:spcAft>
+                <a:spcPts val="400"/>
+              </a:spcAft>
+            </a:pPr>
+            <a:r>
+              <a:rPr sz="1250" b="0">
+                <a:solidFill>
+                  <a:srgbClr val="1F2A3A"/>
+                </a:solidFill>
+                <a:latin typeface="맑은 고딕"/>
+                <a:ea typeface="맑은 고딕"/>
+                <a:cs typeface="맑은 고딕"/>
+              </a:rPr>
+              <a:t>가운데 고칠 곳</a:t>
+            </a:r>
+          </a:p>
+        </p:txBody>
+      </p:sp>
+      <p:sp>
+        <p:nvSpPr>
+          <p:cNvPr id="25" name="Right Arrow 24"/>
+          <p:cNvSpPr/>
+          <p:nvPr/>
+        </p:nvSpPr>
+        <p:spPr>
+          <a:xfrm>
+            <a:off x="9411370" y="3854196"/>
+            <a:ext cx="256031" cy="274320"/>
+          </a:xfrm>
+          <a:prstGeom prst="rightArrow">
+            <a:avLst/>
+          </a:prstGeom>
+          <a:solidFill>
+            <a:srgbClr val="13294B"/>
+          </a:solidFill>
+          <a:ln>
+            <a:noFill/>
+          </a:ln>
+        </p:spPr>
+        <p:txBody>
+          <a:bodyPr rtlCol="0" anchor="ctr"/>
+          <a:lstStyle/>
+          <a:p>
+            <a:pPr algn="ctr"/>
+          </a:p>
+        </p:txBody>
+      </p:sp>
+      <p:sp>
+        <p:nvSpPr>
+          <p:cNvPr id="26" name="Rounded Rectangle 25"/>
+          <p:cNvSpPr/>
+          <p:nvPr/>
+        </p:nvSpPr>
+        <p:spPr>
+          <a:xfrm>
+            <a:off x="9731410" y="2626423"/>
+            <a:ext cx="1911644" cy="2729864"/>
+          </a:xfrm>
+          <a:prstGeom prst="roundRect">
+            <a:avLst>
+              <a:gd name="adj" fmla="val 5000"/>
+            </a:avLst>
+          </a:prstGeom>
+          <a:solidFill>
+            <a:srgbClr val="E7F3FD"/>
+          </a:solidFill>
+          <a:ln w="25400">
+            <a:solidFill>
+              <a:srgbClr val="5CB8F2"/>
+            </a:solidFill>
+          </a:ln>
+        </p:spPr>
+        <p:txBody>
+          <a:bodyPr rtlCol="0" anchor="ctr"/>
+          <a:lstStyle/>
+          <a:p>
+            <a:pPr algn="ctr"/>
+          </a:p>
+        </p:txBody>
+      </p:sp>
+      <p:sp>
+        <p:nvSpPr>
+          <p:cNvPr id="27" name="Oval 26"/>
+          <p:cNvSpPr/>
+          <p:nvPr/>
+        </p:nvSpPr>
+        <p:spPr>
+          <a:xfrm>
+            <a:off x="10321472" y="2809303"/>
+            <a:ext cx="731520" cy="731520"/>
+          </a:xfrm>
+          <a:prstGeom prst="ellipse">
+            <a:avLst/>
+          </a:prstGeom>
+          <a:solidFill>
+            <a:srgbClr val="5CB8F2"/>
+          </a:solidFill>
+          <a:ln>
+            <a:noFill/>
+          </a:ln>
+        </p:spPr>
+        <p:txBody>
+          <a:bodyPr rtlCol="0" anchor="ctr"/>
+          <a:lstStyle/>
+          <a:p>
+            <a:pPr algn="ctr"/>
+          </a:p>
+        </p:txBody>
+      </p:sp>
+      <p:pic>
+        <p:nvPicPr>
+          <p:cNvPr id="28" name="아이콘:repeat" descr="repeat_13294B_1.6.png"/>
+          <p:cNvPicPr>
+            <a:picLocks noChangeAspect="1"/>
+          </p:cNvPicPr>
+          <p:nvPr/>
+        </p:nvPicPr>
+        <p:blipFill>
+          <a:blip r:embed="rId7"/>
+          <a:stretch>
+            <a:fillRect/>
+          </a:stretch>
+        </p:blipFill>
+        <p:spPr>
+          <a:xfrm>
+            <a:off x="10475092" y="2962922"/>
+            <a:ext cx="424281" cy="424281"/>
+          </a:xfrm>
+          <a:prstGeom prst="rect">
+            <a:avLst/>
+          </a:prstGeom>
+        </p:spPr>
+      </p:pic>
+      <p:sp>
+        <p:nvSpPr>
+          <p:cNvPr id="29" name="TextBox 28"/>
+          <p:cNvSpPr txBox="1"/>
+          <p:nvPr/>
+        </p:nvSpPr>
+        <p:spPr>
+          <a:xfrm>
+            <a:off x="9804562" y="3613975"/>
+            <a:ext cx="1765340" cy="1669160"/>
+          </a:xfrm>
+          <a:prstGeom prst="rect">
+            <a:avLst/>
+          </a:prstGeom>
+          <a:noFill/>
+        </p:spPr>
+        <p:txBody>
+          <a:bodyPr wrap="square" anchor="t"/>
+          <a:lstStyle/>
+          <a:p>
+            <a:pPr algn="ctr">
+              <a:lnSpc>
+                <a:spcPct val="110000"/>
+              </a:lnSpc>
+              <a:spcAft>
+                <a:spcPts val="400"/>
+              </a:spcAft>
+            </a:pPr>
+            <a:r>
+              <a:rPr sz="1550" b="1">
+                <a:solidFill>
+                  <a:srgbClr val="13294B"/>
+                </a:solidFill>
+                <a:latin typeface="맑은 고딕"/>
+                <a:ea typeface="맑은 고딕"/>
+                <a:cs typeface="맑은 고딕"/>
+              </a:rPr>
+              <a:t>전체 회귀</a:t>
+            </a:r>
+          </a:p>
+          <a:p>
+            <a:pPr algn="ctr">
+              <a:lnSpc>
+                <a:spcPct val="110000"/>
+              </a:lnSpc>
+              <a:spcAft>
+                <a:spcPts val="400"/>
+              </a:spcAft>
+            </a:pPr>
+            <a:r>
+              <a:rPr sz="1250" b="0">
+                <a:solidFill>
+                  <a:srgbClr val="1F2A3A"/>
+                </a:solidFill>
+                <a:latin typeface="맑은 고딕"/>
+                <a:ea typeface="맑은 고딕"/>
+                <a:cs typeface="맑은 고딕"/>
+              </a:rPr>
+              <a:t>기존 시나리오를</a:t>
+            </a:r>
+          </a:p>
+          <a:p>
+            <a:pPr algn="ctr">
+              <a:lnSpc>
+                <a:spcPct val="110000"/>
+              </a:lnSpc>
+              <a:spcAft>
+                <a:spcPts val="400"/>
+              </a:spcAft>
+            </a:pPr>
+            <a:r>
+              <a:rPr sz="1250" b="0">
+                <a:solidFill>
+                  <a:srgbClr val="1F2A3A"/>
+                </a:solidFill>
+                <a:latin typeface="맑은 고딕"/>
+                <a:ea typeface="맑은 고딕"/>
+                <a:cs typeface="맑은 고딕"/>
+              </a:rPr>
+              <a:t>모두 다시 실행한다</a:t>
+            </a:r>
+          </a:p>
+        </p:txBody>
+      </p:sp>
+    </p:spTree>
+  </p:cSld>
+  <p:clrMapOvr>
+    <a:masterClrMapping/>
+  </p:clrMapOvr>
+</p:sld>
+</file>
+
+<file path=ppt/slides/slide31.xml><?xml version="1.0" encoding="utf-8"?>
+<p:sld xmlns:a="http://schemas.openxmlformats.org/drawingml/2006/main" xmlns:p="http://schemas.openxmlformats.org/presentationml/2006/main" xmlns:r="http://schemas.openxmlformats.org/officeDocument/2006/relationships">
+  <p:cSld>
+    <p:bg>
+      <p:bgPr>
+        <a:solidFill>
           <a:srgbClr val="E7F3FD"/>
         </a:solidFill>
         <a:effectLst/>
@@ -27196,7 +27793,7 @@
 </p:sld>
 </file>
 
-<file path=ppt/slides/slide31.xml><?xml version="1.0" encoding="utf-8"?>
+<file path=ppt/slides/slide32.xml><?xml version="1.0" encoding="utf-8"?>
 <p:sld xmlns:a="http://schemas.openxmlformats.org/drawingml/2006/main" xmlns:p="http://schemas.openxmlformats.org/presentationml/2006/main" xmlns:r="http://schemas.openxmlformats.org/officeDocument/2006/relationships">
   <p:cSld>
     <p:bg>
@@ -27355,7 +27952,7 @@
                 <a:ea typeface="맑은 고딕"/>
                 <a:cs typeface="맑은 고딕"/>
               </a:rPr>
-              <a:t>31</a:t>
+              <a:t>32</a:t>
             </a:r>
           </a:p>
         </p:txBody>
@@ -28025,7 +28622,7 @@
 </p:sld>
 </file>
 
-<file path=ppt/slides/slide32.xml><?xml version="1.0" encoding="utf-8"?>
+<file path=ppt/slides/slide33.xml><?xml version="1.0" encoding="utf-8"?>
 <p:sld xmlns:a="http://schemas.openxmlformats.org/drawingml/2006/main" xmlns:p="http://schemas.openxmlformats.org/presentationml/2006/main" xmlns:r="http://schemas.openxmlformats.org/officeDocument/2006/relationships">
   <p:cSld>
     <p:bg>
@@ -28267,7 +28864,7 @@
 </p:sld>
 </file>
 
-<file path=ppt/slides/slide33.xml><?xml version="1.0" encoding="utf-8"?>
+<file path=ppt/slides/slide34.xml><?xml version="1.0" encoding="utf-8"?>
 <p:sld xmlns:a="http://schemas.openxmlformats.org/drawingml/2006/main" xmlns:p="http://schemas.openxmlformats.org/presentationml/2006/main" xmlns:r="http://schemas.openxmlformats.org/officeDocument/2006/relationships">
   <p:cSld>
     <p:bg>
@@ -28426,7 +29023,7 @@
                 <a:ea typeface="맑은 고딕"/>
                 <a:cs typeface="맑은 고딕"/>
               </a:rPr>
-              <a:t>33</a:t>
+              <a:t>34</a:t>
             </a:r>
           </a:p>
         </p:txBody>
@@ -29221,7 +29818,7 @@
 </p:sld>
 </file>
 
-<file path=ppt/slides/slide34.xml><?xml version="1.0" encoding="utf-8"?>
+<file path=ppt/slides/slide35.xml><?xml version="1.0" encoding="utf-8"?>
 <p:sld xmlns:a="http://schemas.openxmlformats.org/drawingml/2006/main" xmlns:p="http://schemas.openxmlformats.org/presentationml/2006/main" xmlns:r="http://schemas.openxmlformats.org/officeDocument/2006/relationships">
   <p:cSld>
     <p:bg>
@@ -29451,835 +30048,6 @@
                 <a:cs typeface="맑은 고딕"/>
               </a:rPr>
               <a:t>실패한 시나리오의 원인을 가려 고치고 기존 행동이 유지되는지를 확인한다</a:t>
-            </a:r>
-          </a:p>
-        </p:txBody>
-      </p:sp>
-    </p:spTree>
-  </p:cSld>
-  <p:clrMapOvr>
-    <a:masterClrMapping/>
-  </p:clrMapOvr>
-</p:sld>
-</file>
-
-<file path=ppt/slides/slide35.xml><?xml version="1.0" encoding="utf-8"?>
-<p:sld xmlns:a="http://schemas.openxmlformats.org/drawingml/2006/main" xmlns:p="http://schemas.openxmlformats.org/presentationml/2006/main" xmlns:r="http://schemas.openxmlformats.org/officeDocument/2006/relationships">
-  <p:cSld>
-    <p:bg>
-      <p:bgPr>
-        <a:solidFill>
-          <a:srgbClr val="FFFFFF"/>
-        </a:solidFill>
-        <a:effectLst/>
-      </p:bgPr>
-    </p:bg>
-    <p:spTree>
-      <p:nvGrpSpPr>
-        <p:cNvPr id="1" name=""/>
-        <p:cNvGrpSpPr/>
-        <p:nvPr/>
-      </p:nvGrpSpPr>
-      <p:grpSpPr/>
-      <p:sp>
-        <p:nvSpPr>
-          <p:cNvPr id="2" name="TextBox 1"/>
-          <p:cNvSpPr txBox="1"/>
-          <p:nvPr/>
-        </p:nvSpPr>
-        <p:spPr>
-          <a:xfrm>
-            <a:off x="457200" y="329184"/>
-            <a:ext cx="11277295" cy="603504"/>
-          </a:xfrm>
-          <a:prstGeom prst="rect">
-            <a:avLst/>
-          </a:prstGeom>
-          <a:noFill/>
-        </p:spPr>
-        <p:txBody>
-          <a:bodyPr wrap="square" anchor="ctr"/>
-          <a:lstStyle/>
-          <a:p>
-            <a:pPr algn="l">
-              <a:lnSpc>
-                <a:spcPct val="110000"/>
-              </a:lnSpc>
-            </a:pPr>
-            <a:r>
-              <a:rPr sz="2800" b="1">
-                <a:solidFill>
-                  <a:srgbClr val="13294B"/>
-                </a:solidFill>
-                <a:latin typeface="맑은 고딕"/>
-                <a:ea typeface="맑은 고딕"/>
-                <a:cs typeface="맑은 고딕"/>
-              </a:rPr>
-              <a:t>실습에서 고치는 것과 다시 확인하는 것</a:t>
-            </a:r>
-          </a:p>
-        </p:txBody>
-      </p:sp>
-      <p:sp>
-        <p:nvSpPr>
-          <p:cNvPr id="3" name="TextBox 2"/>
-          <p:cNvSpPr txBox="1"/>
-          <p:nvPr/>
-        </p:nvSpPr>
-        <p:spPr>
-          <a:xfrm>
-            <a:off x="457200" y="932688"/>
-            <a:ext cx="11277295" cy="420624"/>
-          </a:xfrm>
-          <a:prstGeom prst="rect">
-            <a:avLst/>
-          </a:prstGeom>
-          <a:noFill/>
-        </p:spPr>
-        <p:txBody>
-          <a:bodyPr wrap="square" anchor="ctr"/>
-          <a:lstStyle/>
-          <a:p>
-            <a:pPr algn="l">
-              <a:lnSpc>
-                <a:spcPct val="110000"/>
-              </a:lnSpc>
-            </a:pPr>
-            <a:r>
-              <a:rPr sz="1600" b="0">
-                <a:solidFill>
-                  <a:srgbClr val="556175"/>
-                </a:solidFill>
-                <a:latin typeface="맑은 고딕"/>
-                <a:ea typeface="맑은 고딕"/>
-                <a:cs typeface="맑은 고딕"/>
-              </a:rPr>
-              <a:t>실패한 시나리오만 원인을 따라가 고치고, 전체 회귀로 긴급 조건과 기존 조건이 함께 통과하는지를 확인한다.</a:t>
-            </a:r>
-          </a:p>
-        </p:txBody>
-      </p:sp>
-      <p:sp>
-        <p:nvSpPr>
-          <p:cNvPr id="4" name="Rectangle 3"/>
-          <p:cNvSpPr/>
-          <p:nvPr/>
-        </p:nvSpPr>
-        <p:spPr>
-          <a:xfrm>
-            <a:off x="548640" y="1408176"/>
-            <a:ext cx="11094415" cy="18288"/>
-          </a:xfrm>
-          <a:prstGeom prst="rect">
-            <a:avLst/>
-          </a:prstGeom>
-          <a:solidFill>
-            <a:srgbClr val="D3D9E1"/>
-          </a:solidFill>
-          <a:ln>
-            <a:noFill/>
-          </a:ln>
-        </p:spPr>
-        <p:txBody>
-          <a:bodyPr rtlCol="0" anchor="ctr"/>
-          <a:lstStyle/>
-          <a:p>
-            <a:pPr algn="ctr"/>
-          </a:p>
-        </p:txBody>
-      </p:sp>
-      <p:sp>
-        <p:nvSpPr>
-          <p:cNvPr id="5" name="TextBox 4"/>
-          <p:cNvSpPr txBox="1"/>
-          <p:nvPr/>
-        </p:nvSpPr>
-        <p:spPr>
-          <a:xfrm>
-            <a:off x="10911535" y="6473952"/>
-            <a:ext cx="822960" cy="274320"/>
-          </a:xfrm>
-          <a:prstGeom prst="rect">
-            <a:avLst/>
-          </a:prstGeom>
-          <a:noFill/>
-        </p:spPr>
-        <p:txBody>
-          <a:bodyPr wrap="square" anchor="t"/>
-          <a:lstStyle/>
-          <a:p>
-            <a:pPr algn="r">
-              <a:lnSpc>
-                <a:spcPct val="110000"/>
-              </a:lnSpc>
-            </a:pPr>
-            <a:r>
-              <a:rPr sz="1000" b="0">
-                <a:solidFill>
-                  <a:srgbClr val="556175"/>
-                </a:solidFill>
-                <a:latin typeface="맑은 고딕"/>
-                <a:ea typeface="맑은 고딕"/>
-                <a:cs typeface="맑은 고딕"/>
-              </a:rPr>
-              <a:t>35</a:t>
-            </a:r>
-          </a:p>
-        </p:txBody>
-      </p:sp>
-      <p:sp>
-        <p:nvSpPr>
-          <p:cNvPr id="6" name="Rounded Rectangle 5"/>
-          <p:cNvSpPr/>
-          <p:nvPr/>
-        </p:nvSpPr>
-        <p:spPr>
-          <a:xfrm>
-            <a:off x="548640" y="2511552"/>
-            <a:ext cx="3515258" cy="2959607"/>
-          </a:xfrm>
-          <a:prstGeom prst="roundRect">
-            <a:avLst>
-              <a:gd name="adj" fmla="val 4000"/>
-            </a:avLst>
-          </a:prstGeom>
-          <a:solidFill>
-            <a:srgbClr val="FFFFFF"/>
-          </a:solidFill>
-          <a:ln w="15875">
-            <a:solidFill>
-              <a:srgbClr val="D3D9E1"/>
-            </a:solidFill>
-          </a:ln>
-        </p:spPr>
-        <p:txBody>
-          <a:bodyPr rtlCol="0" anchor="ctr"/>
-          <a:lstStyle/>
-          <a:p>
-            <a:pPr algn="ctr"/>
-          </a:p>
-        </p:txBody>
-      </p:sp>
-      <p:sp>
-        <p:nvSpPr>
-          <p:cNvPr id="7" name="Oval 6"/>
-          <p:cNvSpPr/>
-          <p:nvPr/>
-        </p:nvSpPr>
-        <p:spPr>
-          <a:xfrm>
-            <a:off x="777240" y="2712720"/>
-            <a:ext cx="731520" cy="731520"/>
-          </a:xfrm>
-          <a:prstGeom prst="ellipse">
-            <a:avLst/>
-          </a:prstGeom>
-          <a:solidFill>
-            <a:srgbClr val="E7F3FD"/>
-          </a:solidFill>
-          <a:ln>
-            <a:noFill/>
-          </a:ln>
-        </p:spPr>
-        <p:txBody>
-          <a:bodyPr rtlCol="0" anchor="ctr"/>
-          <a:lstStyle/>
-          <a:p>
-            <a:pPr algn="ctr"/>
-          </a:p>
-        </p:txBody>
-      </p:sp>
-      <p:pic>
-        <p:nvPicPr>
-          <p:cNvPr id="8" name="아이콘:bug" descr="bug_13294B_1.6.png"/>
-          <p:cNvPicPr>
-            <a:picLocks noChangeAspect="1"/>
-          </p:cNvPicPr>
-          <p:nvPr/>
-        </p:nvPicPr>
-        <p:blipFill>
-          <a:blip r:embed="rId3"/>
-          <a:stretch>
-            <a:fillRect/>
-          </a:stretch>
-        </p:blipFill>
-        <p:spPr>
-          <a:xfrm>
-            <a:off x="930859" y="2866339"/>
-            <a:ext cx="424281" cy="424281"/>
-          </a:xfrm>
-          <a:prstGeom prst="rect">
-            <a:avLst/>
-          </a:prstGeom>
-        </p:spPr>
-      </p:pic>
-      <p:sp>
-        <p:nvSpPr>
-          <p:cNvPr id="9" name="TextBox 8"/>
-          <p:cNvSpPr txBox="1"/>
-          <p:nvPr/>
-        </p:nvSpPr>
-        <p:spPr>
-          <a:xfrm>
-            <a:off x="713232" y="3535680"/>
-            <a:ext cx="3186074" cy="1432559"/>
-          </a:xfrm>
-          <a:prstGeom prst="rect">
-            <a:avLst/>
-          </a:prstGeom>
-          <a:noFill/>
-        </p:spPr>
-        <p:txBody>
-          <a:bodyPr wrap="square" anchor="t"/>
-          <a:lstStyle/>
-          <a:p>
-            <a:pPr algn="l">
-              <a:lnSpc>
-                <a:spcPct val="110000"/>
-              </a:lnSpc>
-              <a:spcAft>
-                <a:spcPts val="400"/>
-              </a:spcAft>
-            </a:pPr>
-            <a:r>
-              <a:rPr sz="1800" b="1">
-                <a:solidFill>
-                  <a:srgbClr val="13294B"/>
-                </a:solidFill>
-                <a:latin typeface="맑은 고딕"/>
-                <a:ea typeface="맑은 고딕"/>
-                <a:cs typeface="맑은 고딕"/>
-              </a:rPr>
-              <a:t>원인 추적</a:t>
-            </a:r>
-          </a:p>
-          <a:p>
-            <a:pPr algn="l">
-              <a:lnSpc>
-                <a:spcPct val="110000"/>
-              </a:lnSpc>
-              <a:spcAft>
-                <a:spcPts val="400"/>
-              </a:spcAft>
-            </a:pPr>
-            <a:r>
-              <a:rPr sz="1400" b="0">
-                <a:solidFill>
-                  <a:srgbClr val="1F2A3A"/>
-                </a:solidFill>
-                <a:latin typeface="맑은 고딕"/>
-                <a:ea typeface="맑은 고딕"/>
-                <a:cs typeface="맑은 고딕"/>
-              </a:rPr>
-              <a:t>실제로 실패한 시나리오만 골라 원인을 따라간다</a:t>
-            </a:r>
-          </a:p>
-        </p:txBody>
-      </p:sp>
-      <p:sp>
-        <p:nvSpPr>
-          <p:cNvPr id="10" name="Rounded Rectangle 9"/>
-          <p:cNvSpPr/>
-          <p:nvPr/>
-        </p:nvSpPr>
-        <p:spPr>
-          <a:xfrm>
-            <a:off x="777240" y="5041392"/>
-            <a:ext cx="1173480" cy="292608"/>
-          </a:xfrm>
-          <a:prstGeom prst="roundRect">
-            <a:avLst>
-              <a:gd name="adj" fmla="val 50000"/>
-            </a:avLst>
-          </a:prstGeom>
-          <a:solidFill>
-            <a:srgbClr val="D3D9E1"/>
-          </a:solidFill>
-          <a:ln>
-            <a:noFill/>
-          </a:ln>
-        </p:spPr>
-        <p:txBody>
-          <a:bodyPr rtlCol="0" anchor="ctr"/>
-          <a:lstStyle/>
-          <a:p>
-            <a:pPr algn="ctr"/>
-          </a:p>
-        </p:txBody>
-      </p:sp>
-      <p:sp>
-        <p:nvSpPr>
-          <p:cNvPr id="11" name="TextBox 10"/>
-          <p:cNvSpPr txBox="1"/>
-          <p:nvPr/>
-        </p:nvSpPr>
-        <p:spPr>
-          <a:xfrm>
-            <a:off x="777240" y="5041392"/>
-            <a:ext cx="1173480" cy="292608"/>
-          </a:xfrm>
-          <a:prstGeom prst="rect">
-            <a:avLst/>
-          </a:prstGeom>
-          <a:noFill/>
-        </p:spPr>
-        <p:txBody>
-          <a:bodyPr wrap="square" anchor="ctr"/>
-          <a:lstStyle/>
-          <a:p>
-            <a:pPr algn="ctr">
-              <a:lnSpc>
-                <a:spcPct val="110000"/>
-              </a:lnSpc>
-            </a:pPr>
-            <a:r>
-              <a:rPr sz="1200" b="1">
-                <a:solidFill>
-                  <a:srgbClr val="13294B"/>
-                </a:solidFill>
-                <a:latin typeface="맑은 고딕"/>
-                <a:ea typeface="맑은 고딕"/>
-                <a:cs typeface="맑은 고딕"/>
-              </a:rPr>
-              <a:t>실패한 것만</a:t>
-            </a:r>
-          </a:p>
-        </p:txBody>
-      </p:sp>
-      <p:sp>
-        <p:nvSpPr>
-          <p:cNvPr id="12" name="Rounded Rectangle 11"/>
-          <p:cNvSpPr/>
-          <p:nvPr/>
-        </p:nvSpPr>
-        <p:spPr>
-          <a:xfrm>
-            <a:off x="4338218" y="2511552"/>
-            <a:ext cx="3515258" cy="2959607"/>
-          </a:xfrm>
-          <a:prstGeom prst="roundRect">
-            <a:avLst>
-              <a:gd name="adj" fmla="val 4000"/>
-            </a:avLst>
-          </a:prstGeom>
-          <a:solidFill>
-            <a:srgbClr val="FFFFFF"/>
-          </a:solidFill>
-          <a:ln w="15875">
-            <a:solidFill>
-              <a:srgbClr val="D3D9E1"/>
-            </a:solidFill>
-          </a:ln>
-        </p:spPr>
-        <p:txBody>
-          <a:bodyPr rtlCol="0" anchor="ctr"/>
-          <a:lstStyle/>
-          <a:p>
-            <a:pPr algn="ctr"/>
-          </a:p>
-        </p:txBody>
-      </p:sp>
-      <p:sp>
-        <p:nvSpPr>
-          <p:cNvPr id="13" name="Oval 12"/>
-          <p:cNvSpPr/>
-          <p:nvPr/>
-        </p:nvSpPr>
-        <p:spPr>
-          <a:xfrm>
-            <a:off x="4566818" y="2712720"/>
-            <a:ext cx="731520" cy="731520"/>
-          </a:xfrm>
-          <a:prstGeom prst="ellipse">
-            <a:avLst/>
-          </a:prstGeom>
-          <a:solidFill>
-            <a:srgbClr val="E7F3FD"/>
-          </a:solidFill>
-          <a:ln>
-            <a:noFill/>
-          </a:ln>
-        </p:spPr>
-        <p:txBody>
-          <a:bodyPr rtlCol="0" anchor="ctr"/>
-          <a:lstStyle/>
-          <a:p>
-            <a:pPr algn="ctr"/>
-          </a:p>
-        </p:txBody>
-      </p:sp>
-      <p:pic>
-        <p:nvPicPr>
-          <p:cNvPr id="14" name="아이콘:tool" descr="tool_13294B_1.6.png"/>
-          <p:cNvPicPr>
-            <a:picLocks noChangeAspect="1"/>
-          </p:cNvPicPr>
-          <p:nvPr/>
-        </p:nvPicPr>
-        <p:blipFill>
-          <a:blip r:embed="rId4"/>
-          <a:stretch>
-            <a:fillRect/>
-          </a:stretch>
-        </p:blipFill>
-        <p:spPr>
-          <a:xfrm>
-            <a:off x="4720437" y="2866339"/>
-            <a:ext cx="424281" cy="424281"/>
-          </a:xfrm>
-          <a:prstGeom prst="rect">
-            <a:avLst/>
-          </a:prstGeom>
-        </p:spPr>
-      </p:pic>
-      <p:sp>
-        <p:nvSpPr>
-          <p:cNvPr id="15" name="TextBox 14"/>
-          <p:cNvSpPr txBox="1"/>
-          <p:nvPr/>
-        </p:nvSpPr>
-        <p:spPr>
-          <a:xfrm>
-            <a:off x="4502810" y="3535680"/>
-            <a:ext cx="3186074" cy="1432559"/>
-          </a:xfrm>
-          <a:prstGeom prst="rect">
-            <a:avLst/>
-          </a:prstGeom>
-          <a:noFill/>
-        </p:spPr>
-        <p:txBody>
-          <a:bodyPr wrap="square" anchor="t"/>
-          <a:lstStyle/>
-          <a:p>
-            <a:pPr algn="l">
-              <a:lnSpc>
-                <a:spcPct val="110000"/>
-              </a:lnSpc>
-              <a:spcAft>
-                <a:spcPts val="400"/>
-              </a:spcAft>
-            </a:pPr>
-            <a:r>
-              <a:rPr sz="1800" b="1">
-                <a:solidFill>
-                  <a:srgbClr val="13294B"/>
-                </a:solidFill>
-                <a:latin typeface="맑은 고딕"/>
-                <a:ea typeface="맑은 고딕"/>
-                <a:cs typeface="맑은 고딕"/>
-              </a:rPr>
-              <a:t>수정 대상의 구분</a:t>
-            </a:r>
-          </a:p>
-          <a:p>
-            <a:pPr algn="l">
-              <a:lnSpc>
-                <a:spcPct val="110000"/>
-              </a:lnSpc>
-              <a:spcAft>
-                <a:spcPts val="400"/>
-              </a:spcAft>
-            </a:pPr>
-            <a:r>
-              <a:rPr sz="1400" b="0">
-                <a:solidFill>
-                  <a:srgbClr val="1F2A3A"/>
-                </a:solidFill>
-                <a:latin typeface="맑은 고딕"/>
-                <a:ea typeface="맑은 고딕"/>
-                <a:cs typeface="맑은 고딕"/>
-              </a:rPr>
-              <a:t>프롬프트, 명세, 코드 가운데 고칠 곳을 가려 고치고 다시 실행한다</a:t>
-            </a:r>
-          </a:p>
-        </p:txBody>
-      </p:sp>
-      <p:sp>
-        <p:nvSpPr>
-          <p:cNvPr id="16" name="Rounded Rectangle 15"/>
-          <p:cNvSpPr/>
-          <p:nvPr/>
-        </p:nvSpPr>
-        <p:spPr>
-          <a:xfrm>
-            <a:off x="4566818" y="5041392"/>
-            <a:ext cx="868680" cy="292608"/>
-          </a:xfrm>
-          <a:prstGeom prst="roundRect">
-            <a:avLst>
-              <a:gd name="adj" fmla="val 50000"/>
-            </a:avLst>
-          </a:prstGeom>
-          <a:solidFill>
-            <a:srgbClr val="D3D9E1"/>
-          </a:solidFill>
-          <a:ln>
-            <a:noFill/>
-          </a:ln>
-        </p:spPr>
-        <p:txBody>
-          <a:bodyPr rtlCol="0" anchor="ctr"/>
-          <a:lstStyle/>
-          <a:p>
-            <a:pPr algn="ctr"/>
-          </a:p>
-        </p:txBody>
-      </p:sp>
-      <p:sp>
-        <p:nvSpPr>
-          <p:cNvPr id="17" name="TextBox 16"/>
-          <p:cNvSpPr txBox="1"/>
-          <p:nvPr/>
-        </p:nvSpPr>
-        <p:spPr>
-          <a:xfrm>
-            <a:off x="4566818" y="5041392"/>
-            <a:ext cx="868680" cy="292608"/>
-          </a:xfrm>
-          <a:prstGeom prst="rect">
-            <a:avLst/>
-          </a:prstGeom>
-          <a:noFill/>
-        </p:spPr>
-        <p:txBody>
-          <a:bodyPr wrap="square" anchor="ctr"/>
-          <a:lstStyle/>
-          <a:p>
-            <a:pPr algn="ctr">
-              <a:lnSpc>
-                <a:spcPct val="110000"/>
-              </a:lnSpc>
-            </a:pPr>
-            <a:r>
-              <a:rPr sz="1200" b="1">
-                <a:solidFill>
-                  <a:srgbClr val="13294B"/>
-                </a:solidFill>
-                <a:latin typeface="맑은 고딕"/>
-                <a:ea typeface="맑은 고딕"/>
-                <a:cs typeface="맑은 고딕"/>
-              </a:rPr>
-              <a:t>고칠 곳</a:t>
-            </a:r>
-          </a:p>
-        </p:txBody>
-      </p:sp>
-      <p:sp>
-        <p:nvSpPr>
-          <p:cNvPr id="18" name="Rounded Rectangle 17"/>
-          <p:cNvSpPr/>
-          <p:nvPr/>
-        </p:nvSpPr>
-        <p:spPr>
-          <a:xfrm>
-            <a:off x="8127796" y="2511552"/>
-            <a:ext cx="3515258" cy="2959607"/>
-          </a:xfrm>
-          <a:prstGeom prst="roundRect">
-            <a:avLst>
-              <a:gd name="adj" fmla="val 4000"/>
-            </a:avLst>
-          </a:prstGeom>
-          <a:solidFill>
-            <a:srgbClr val="FFFFFF"/>
-          </a:solidFill>
-          <a:ln w="28575">
-            <a:solidFill>
-              <a:srgbClr val="5CB8F2"/>
-            </a:solidFill>
-          </a:ln>
-        </p:spPr>
-        <p:txBody>
-          <a:bodyPr rtlCol="0" anchor="ctr"/>
-          <a:lstStyle/>
-          <a:p>
-            <a:pPr algn="ctr"/>
-          </a:p>
-        </p:txBody>
-      </p:sp>
-      <p:sp>
-        <p:nvSpPr>
-          <p:cNvPr id="19" name="Oval 18"/>
-          <p:cNvSpPr/>
-          <p:nvPr/>
-        </p:nvSpPr>
-        <p:spPr>
-          <a:xfrm>
-            <a:off x="8356396" y="2712720"/>
-            <a:ext cx="731520" cy="731520"/>
-          </a:xfrm>
-          <a:prstGeom prst="ellipse">
-            <a:avLst/>
-          </a:prstGeom>
-          <a:solidFill>
-            <a:srgbClr val="5CB8F2"/>
-          </a:solidFill>
-          <a:ln>
-            <a:noFill/>
-          </a:ln>
-        </p:spPr>
-        <p:txBody>
-          <a:bodyPr rtlCol="0" anchor="ctr"/>
-          <a:lstStyle/>
-          <a:p>
-            <a:pPr algn="ctr"/>
-          </a:p>
-        </p:txBody>
-      </p:sp>
-      <p:pic>
-        <p:nvPicPr>
-          <p:cNvPr id="20" name="아이콘:repeat" descr="repeat_13294B_1.6.png"/>
-          <p:cNvPicPr>
-            <a:picLocks noChangeAspect="1"/>
-          </p:cNvPicPr>
-          <p:nvPr/>
-        </p:nvPicPr>
-        <p:blipFill>
-          <a:blip r:embed="rId5"/>
-          <a:stretch>
-            <a:fillRect/>
-          </a:stretch>
-        </p:blipFill>
-        <p:spPr>
-          <a:xfrm>
-            <a:off x="8510016" y="2866339"/>
-            <a:ext cx="424281" cy="424281"/>
-          </a:xfrm>
-          <a:prstGeom prst="rect">
-            <a:avLst/>
-          </a:prstGeom>
-        </p:spPr>
-      </p:pic>
-      <p:sp>
-        <p:nvSpPr>
-          <p:cNvPr id="21" name="TextBox 20"/>
-          <p:cNvSpPr txBox="1"/>
-          <p:nvPr/>
-        </p:nvSpPr>
-        <p:spPr>
-          <a:xfrm>
-            <a:off x="8292388" y="3535680"/>
-            <a:ext cx="3186074" cy="1432559"/>
-          </a:xfrm>
-          <a:prstGeom prst="rect">
-            <a:avLst/>
-          </a:prstGeom>
-          <a:noFill/>
-        </p:spPr>
-        <p:txBody>
-          <a:bodyPr wrap="square" anchor="t"/>
-          <a:lstStyle/>
-          <a:p>
-            <a:pPr algn="l">
-              <a:lnSpc>
-                <a:spcPct val="110000"/>
-              </a:lnSpc>
-              <a:spcAft>
-                <a:spcPts val="400"/>
-              </a:spcAft>
-            </a:pPr>
-            <a:r>
-              <a:rPr sz="1800" b="1">
-                <a:solidFill>
-                  <a:srgbClr val="13294B"/>
-                </a:solidFill>
-                <a:latin typeface="맑은 고딕"/>
-                <a:ea typeface="맑은 고딕"/>
-                <a:cs typeface="맑은 고딕"/>
-              </a:rPr>
-              <a:t>전체 회귀</a:t>
-            </a:r>
-          </a:p>
-          <a:p>
-            <a:pPr algn="l">
-              <a:lnSpc>
-                <a:spcPct val="110000"/>
-              </a:lnSpc>
-              <a:spcAft>
-                <a:spcPts val="400"/>
-              </a:spcAft>
-            </a:pPr>
-            <a:r>
-              <a:rPr sz="1400" b="0">
-                <a:solidFill>
-                  <a:srgbClr val="1F2A3A"/>
-                </a:solidFill>
-                <a:latin typeface="맑은 고딕"/>
-                <a:ea typeface="맑은 고딕"/>
-                <a:cs typeface="맑은 고딕"/>
-              </a:rPr>
-              <a:t>긴급 조건이 동작하면서 기존의 일반 요청, 보류, 거절 조건이 그대로인지를 확인한다</a:t>
-            </a:r>
-          </a:p>
-        </p:txBody>
-      </p:sp>
-      <p:sp>
-        <p:nvSpPr>
-          <p:cNvPr id="22" name="Rounded Rectangle 21"/>
-          <p:cNvSpPr/>
-          <p:nvPr/>
-        </p:nvSpPr>
-        <p:spPr>
-          <a:xfrm>
-            <a:off x="8356396" y="5041392"/>
-            <a:ext cx="1021080" cy="292608"/>
-          </a:xfrm>
-          <a:prstGeom prst="roundRect">
-            <a:avLst>
-              <a:gd name="adj" fmla="val 50000"/>
-            </a:avLst>
-          </a:prstGeom>
-          <a:solidFill>
-            <a:srgbClr val="5CB8F2"/>
-          </a:solidFill>
-          <a:ln>
-            <a:noFill/>
-          </a:ln>
-        </p:spPr>
-        <p:txBody>
-          <a:bodyPr rtlCol="0" anchor="ctr"/>
-          <a:lstStyle/>
-          <a:p>
-            <a:pPr algn="ctr"/>
-          </a:p>
-        </p:txBody>
-      </p:sp>
-      <p:sp>
-        <p:nvSpPr>
-          <p:cNvPr id="23" name="TextBox 22"/>
-          <p:cNvSpPr txBox="1"/>
-          <p:nvPr/>
-        </p:nvSpPr>
-        <p:spPr>
-          <a:xfrm>
-            <a:off x="8356396" y="5041392"/>
-            <a:ext cx="1021080" cy="292608"/>
-          </a:xfrm>
-          <a:prstGeom prst="rect">
-            <a:avLst/>
-          </a:prstGeom>
-          <a:noFill/>
-        </p:spPr>
-        <p:txBody>
-          <a:bodyPr wrap="square" anchor="ctr"/>
-          <a:lstStyle/>
-          <a:p>
-            <a:pPr algn="ctr">
-              <a:lnSpc>
-                <a:spcPct val="110000"/>
-              </a:lnSpc>
-            </a:pPr>
-            <a:r>
-              <a:rPr sz="1200" b="1">
-                <a:solidFill>
-                  <a:srgbClr val="13294B"/>
-                </a:solidFill>
-                <a:latin typeface="맑은 고딕"/>
-                <a:ea typeface="맑은 고딕"/>
-                <a:cs typeface="맑은 고딕"/>
-              </a:rPr>
-              <a:t>유지 확인</a:t>
             </a:r>
           </a:p>
         </p:txBody>
@@ -30344,7 +30112,7 @@
                 <a:ea typeface="맑은 고딕"/>
                 <a:cs typeface="맑은 고딕"/>
               </a:rPr>
-              <a:t>데이터 패브릭: 출처에 둔 채 연결해 함께 읽는 방식</a:t>
+              <a:t>실습에서 고치는 것과 다시 확인하는 것</a:t>
             </a:r>
           </a:p>
         </p:txBody>
@@ -30383,7 +30151,7 @@
                 <a:ea typeface="맑은 고딕"/>
                 <a:cs typeface="맑은 고딕"/>
               </a:rPr>
-              <a:t>데이터 패브릭은 여러 시스템의 데이터를 출처에 둔 채 함께 읽는 방식이며, 값마다 출처와 읽은 시각을 붙인다.</a:t>
+              <a:t>실패한 시나리오만 원인을 따라가 고치고, 전체 회귀로 긴급 조건과 기존 조건이 함께 통과하는지를 확인한다.</a:t>
             </a:r>
           </a:p>
         </p:txBody>
@@ -30464,13 +30232,44 @@
         </p:nvSpPr>
         <p:spPr>
           <a:xfrm>
-            <a:off x="548640" y="1961388"/>
-            <a:ext cx="11094415" cy="1316736"/>
+            <a:off x="548640" y="2511552"/>
+            <a:ext cx="3515258" cy="2959607"/>
           </a:xfrm>
           <a:prstGeom prst="roundRect">
             <a:avLst>
-              <a:gd name="adj" fmla="val 6000"/>
+              <a:gd name="adj" fmla="val 4000"/>
             </a:avLst>
+          </a:prstGeom>
+          <a:solidFill>
+            <a:srgbClr val="FFFFFF"/>
+          </a:solidFill>
+          <a:ln w="15875">
+            <a:solidFill>
+              <a:srgbClr val="D3D9E1"/>
+            </a:solidFill>
+          </a:ln>
+        </p:spPr>
+        <p:txBody>
+          <a:bodyPr rtlCol="0" anchor="ctr"/>
+          <a:lstStyle/>
+          <a:p>
+            <a:pPr algn="ctr"/>
+          </a:p>
+        </p:txBody>
+      </p:sp>
+      <p:sp>
+        <p:nvSpPr>
+          <p:cNvPr id="7" name="Oval 6"/>
+          <p:cNvSpPr/>
+          <p:nvPr/>
+        </p:nvSpPr>
+        <p:spPr>
+          <a:xfrm>
+            <a:off x="777240" y="2712720"/>
+            <a:ext cx="731520" cy="731520"/>
+          </a:xfrm>
+          <a:prstGeom prst="ellipse">
+            <a:avLst/>
           </a:prstGeom>
           <a:solidFill>
             <a:srgbClr val="E7F3FD"/>
@@ -30487,24 +30286,48 @@
           </a:p>
         </p:txBody>
       </p:sp>
-      <p:sp>
-        <p:nvSpPr>
-          <p:cNvPr id="7" name="TextBox 6"/>
-          <p:cNvSpPr txBox="1"/>
-          <p:nvPr/>
-        </p:nvSpPr>
-        <p:spPr>
-          <a:xfrm>
-            <a:off x="640080" y="1933956"/>
-            <a:ext cx="3291839" cy="1371600"/>
-          </a:xfrm>
-          <a:prstGeom prst="rect">
-            <a:avLst/>
-          </a:prstGeom>
-          <a:noFill/>
-        </p:spPr>
-        <p:txBody>
-          <a:bodyPr wrap="square" anchor="ctr"/>
+      <p:pic>
+        <p:nvPicPr>
+          <p:cNvPr id="8" name="아이콘:bug" descr="bug_13294B_1.6.png"/>
+          <p:cNvPicPr>
+            <a:picLocks noChangeAspect="1"/>
+          </p:cNvPicPr>
+          <p:nvPr/>
+        </p:nvPicPr>
+        <p:blipFill>
+          <a:blip r:embed="rId3"/>
+          <a:stretch>
+            <a:fillRect/>
+          </a:stretch>
+        </p:blipFill>
+        <p:spPr>
+          <a:xfrm>
+            <a:off x="930859" y="2866339"/>
+            <a:ext cx="424281" cy="424281"/>
+          </a:xfrm>
+          <a:prstGeom prst="rect">
+            <a:avLst/>
+          </a:prstGeom>
+        </p:spPr>
+      </p:pic>
+      <p:sp>
+        <p:nvSpPr>
+          <p:cNvPr id="9" name="TextBox 8"/>
+          <p:cNvSpPr txBox="1"/>
+          <p:nvPr/>
+        </p:nvSpPr>
+        <p:spPr>
+          <a:xfrm>
+            <a:off x="713232" y="3535680"/>
+            <a:ext cx="3186074" cy="1432559"/>
+          </a:xfrm>
+          <a:prstGeom prst="rect">
+            <a:avLst/>
+          </a:prstGeom>
+          <a:noFill/>
+        </p:spPr>
+        <p:txBody>
+          <a:bodyPr wrap="square" anchor="t"/>
           <a:lstStyle/>
           <a:p>
             <a:pPr algn="l">
@@ -30512,7 +30335,7 @@
                 <a:spcPct val="110000"/>
               </a:lnSpc>
               <a:spcAft>
-                <a:spcPts val="200"/>
+                <a:spcPts val="400"/>
               </a:spcAft>
             </a:pPr>
             <a:r>
@@ -30524,7 +30347,7 @@
                 <a:ea typeface="맑은 고딕"/>
                 <a:cs typeface="맑은 고딕"/>
               </a:rPr>
-              <a:t>데이터 패브릭</a:t>
+              <a:t>원인 추적</a:t>
             </a:r>
           </a:p>
           <a:p>
@@ -30533,52 +30356,10 @@
                 <a:spcPct val="110000"/>
               </a:lnSpc>
               <a:spcAft>
-                <a:spcPts val="200"/>
+                <a:spcPts val="400"/>
               </a:spcAft>
             </a:pPr>
             <a:r>
-              <a:rPr sz="1150" b="0">
-                <a:solidFill>
-                  <a:srgbClr val="556175"/>
-                </a:solidFill>
-                <a:latin typeface="맑은 고딕"/>
-                <a:ea typeface="맑은 고딕"/>
-                <a:cs typeface="맑은 고딕"/>
-              </a:rPr>
-              <a:t>Data Fabric</a:t>
-            </a:r>
-          </a:p>
-        </p:txBody>
-      </p:sp>
-      <p:sp>
-        <p:nvSpPr>
-          <p:cNvPr id="8" name="TextBox 7"/>
-          <p:cNvSpPr txBox="1"/>
-          <p:nvPr/>
-        </p:nvSpPr>
-        <p:spPr>
-          <a:xfrm>
-            <a:off x="4023359" y="1933956"/>
-            <a:ext cx="7528255" cy="1371600"/>
-          </a:xfrm>
-          <a:prstGeom prst="rect">
-            <a:avLst/>
-          </a:prstGeom>
-          <a:noFill/>
-        </p:spPr>
-        <p:txBody>
-          <a:bodyPr wrap="square" anchor="ctr"/>
-          <a:lstStyle/>
-          <a:p>
-            <a:pPr algn="l">
-              <a:lnSpc>
-                <a:spcPct val="110000"/>
-              </a:lnSpc>
-              <a:spcAft>
-                <a:spcPts val="300"/>
-              </a:spcAft>
-            </a:pPr>
-            <a:r>
               <a:rPr sz="1400" b="0">
                 <a:solidFill>
                   <a:srgbClr val="1F2A3A"/>
@@ -30587,24 +30368,26 @@
                 <a:ea typeface="맑은 고딕"/>
                 <a:cs typeface="맑은 고딕"/>
               </a:rPr>
-              <a:t>여러 시스템의 데이터를 한곳으로 옮겨 모으지 않고, 출처에 둔 채 연결해 한 번의 물음으로 함께 읽는 방식이다.</a:t>
-            </a:r>
-          </a:p>
-        </p:txBody>
-      </p:sp>
-      <p:sp>
-        <p:nvSpPr>
-          <p:cNvPr id="9" name="Rectangle 8"/>
+              <a:t>실제로 실패한 시나리오만 골라 원인을 따라간다</a:t>
+            </a:r>
+          </a:p>
+        </p:txBody>
+      </p:sp>
+      <p:sp>
+        <p:nvSpPr>
+          <p:cNvPr id="10" name="Rounded Rectangle 9"/>
           <p:cNvSpPr/>
           <p:nvPr/>
         </p:nvSpPr>
         <p:spPr>
           <a:xfrm>
-            <a:off x="548640" y="3296412"/>
-            <a:ext cx="11094415" cy="13716"/>
-          </a:xfrm>
-          <a:prstGeom prst="rect">
-            <a:avLst/>
+            <a:off x="777240" y="5041392"/>
+            <a:ext cx="1173480" cy="292608"/>
+          </a:xfrm>
+          <a:prstGeom prst="roundRect">
+            <a:avLst>
+              <a:gd name="adj" fmla="val 50000"/>
+            </a:avLst>
           </a:prstGeom>
           <a:solidFill>
             <a:srgbClr val="D3D9E1"/>
@@ -30623,14 +30406,14 @@
       </p:sp>
       <p:sp>
         <p:nvSpPr>
-          <p:cNvPr id="10" name="TextBox 9"/>
-          <p:cNvSpPr txBox="1"/>
-          <p:nvPr/>
-        </p:nvSpPr>
-        <p:spPr>
-          <a:xfrm>
-            <a:off x="640080" y="3305556"/>
-            <a:ext cx="3291839" cy="1371600"/>
+          <p:cNvPr id="11" name="TextBox 10"/>
+          <p:cNvSpPr txBox="1"/>
+          <p:nvPr/>
+        </p:nvSpPr>
+        <p:spPr>
+          <a:xfrm>
+            <a:off x="777240" y="5041392"/>
+            <a:ext cx="1173480" cy="292608"/>
           </a:xfrm>
           <a:prstGeom prst="rect">
             <a:avLst/>
@@ -30641,12 +30424,137 @@
           <a:bodyPr wrap="square" anchor="ctr"/>
           <a:lstStyle/>
           <a:p>
+            <a:pPr algn="ctr">
+              <a:lnSpc>
+                <a:spcPct val="110000"/>
+              </a:lnSpc>
+            </a:pPr>
+            <a:r>
+              <a:rPr sz="1200" b="1">
+                <a:solidFill>
+                  <a:srgbClr val="13294B"/>
+                </a:solidFill>
+                <a:latin typeface="맑은 고딕"/>
+                <a:ea typeface="맑은 고딕"/>
+                <a:cs typeface="맑은 고딕"/>
+              </a:rPr>
+              <a:t>실패한 것만</a:t>
+            </a:r>
+          </a:p>
+        </p:txBody>
+      </p:sp>
+      <p:sp>
+        <p:nvSpPr>
+          <p:cNvPr id="12" name="Rounded Rectangle 11"/>
+          <p:cNvSpPr/>
+          <p:nvPr/>
+        </p:nvSpPr>
+        <p:spPr>
+          <a:xfrm>
+            <a:off x="4338218" y="2511552"/>
+            <a:ext cx="3515258" cy="2959607"/>
+          </a:xfrm>
+          <a:prstGeom prst="roundRect">
+            <a:avLst>
+              <a:gd name="adj" fmla="val 4000"/>
+            </a:avLst>
+          </a:prstGeom>
+          <a:solidFill>
+            <a:srgbClr val="FFFFFF"/>
+          </a:solidFill>
+          <a:ln w="15875">
+            <a:solidFill>
+              <a:srgbClr val="D3D9E1"/>
+            </a:solidFill>
+          </a:ln>
+        </p:spPr>
+        <p:txBody>
+          <a:bodyPr rtlCol="0" anchor="ctr"/>
+          <a:lstStyle/>
+          <a:p>
+            <a:pPr algn="ctr"/>
+          </a:p>
+        </p:txBody>
+      </p:sp>
+      <p:sp>
+        <p:nvSpPr>
+          <p:cNvPr id="13" name="Oval 12"/>
+          <p:cNvSpPr/>
+          <p:nvPr/>
+        </p:nvSpPr>
+        <p:spPr>
+          <a:xfrm>
+            <a:off x="4566818" y="2712720"/>
+            <a:ext cx="731520" cy="731520"/>
+          </a:xfrm>
+          <a:prstGeom prst="ellipse">
+            <a:avLst/>
+          </a:prstGeom>
+          <a:solidFill>
+            <a:srgbClr val="E7F3FD"/>
+          </a:solidFill>
+          <a:ln>
+            <a:noFill/>
+          </a:ln>
+        </p:spPr>
+        <p:txBody>
+          <a:bodyPr rtlCol="0" anchor="ctr"/>
+          <a:lstStyle/>
+          <a:p>
+            <a:pPr algn="ctr"/>
+          </a:p>
+        </p:txBody>
+      </p:sp>
+      <p:pic>
+        <p:nvPicPr>
+          <p:cNvPr id="14" name="아이콘:tool" descr="tool_13294B_1.6.png"/>
+          <p:cNvPicPr>
+            <a:picLocks noChangeAspect="1"/>
+          </p:cNvPicPr>
+          <p:nvPr/>
+        </p:nvPicPr>
+        <p:blipFill>
+          <a:blip r:embed="rId4"/>
+          <a:stretch>
+            <a:fillRect/>
+          </a:stretch>
+        </p:blipFill>
+        <p:spPr>
+          <a:xfrm>
+            <a:off x="4720437" y="2866339"/>
+            <a:ext cx="424281" cy="424281"/>
+          </a:xfrm>
+          <a:prstGeom prst="rect">
+            <a:avLst/>
+          </a:prstGeom>
+        </p:spPr>
+      </p:pic>
+      <p:sp>
+        <p:nvSpPr>
+          <p:cNvPr id="15" name="TextBox 14"/>
+          <p:cNvSpPr txBox="1"/>
+          <p:nvPr/>
+        </p:nvSpPr>
+        <p:spPr>
+          <a:xfrm>
+            <a:off x="4502810" y="3535680"/>
+            <a:ext cx="3186074" cy="1432559"/>
+          </a:xfrm>
+          <a:prstGeom prst="rect">
+            <a:avLst/>
+          </a:prstGeom>
+          <a:noFill/>
+        </p:spPr>
+        <p:txBody>
+          <a:bodyPr wrap="square" anchor="t"/>
+          <a:lstStyle/>
+          <a:p>
             <a:pPr algn="l">
               <a:lnSpc>
                 <a:spcPct val="110000"/>
               </a:lnSpc>
               <a:spcAft>
-                <a:spcPts val="200"/>
+                <a:spcPts val="400"/>
               </a:spcAft>
             </a:pPr>
             <a:r>
@@ -30658,7 +30566,7 @@
                 <a:ea typeface="맑은 고딕"/>
                 <a:cs typeface="맑은 고딕"/>
               </a:rPr>
-              <a:t>출처와 읽은 시각</a:t>
+              <a:t>수정 대상의 구분</a:t>
             </a:r>
           </a:p>
           <a:p>
@@ -30667,52 +30575,10 @@
                 <a:spcPct val="110000"/>
               </a:lnSpc>
               <a:spcAft>
-                <a:spcPts val="200"/>
+                <a:spcPts val="400"/>
               </a:spcAft>
             </a:pPr>
             <a:r>
-              <a:rPr sz="1150" b="0">
-                <a:solidFill>
-                  <a:srgbClr val="556175"/>
-                </a:solidFill>
-                <a:latin typeface="맑은 고딕"/>
-                <a:ea typeface="맑은 고딕"/>
-                <a:cs typeface="맑은 고딕"/>
-              </a:rPr>
-              <a:t>값의 근거</a:t>
-            </a:r>
-          </a:p>
-        </p:txBody>
-      </p:sp>
-      <p:sp>
-        <p:nvSpPr>
-          <p:cNvPr id="11" name="TextBox 10"/>
-          <p:cNvSpPr txBox="1"/>
-          <p:nvPr/>
-        </p:nvSpPr>
-        <p:spPr>
-          <a:xfrm>
-            <a:off x="4023359" y="3305556"/>
-            <a:ext cx="7528255" cy="1371600"/>
-          </a:xfrm>
-          <a:prstGeom prst="rect">
-            <a:avLst/>
-          </a:prstGeom>
-          <a:noFill/>
-        </p:spPr>
-        <p:txBody>
-          <a:bodyPr wrap="square" anchor="ctr"/>
-          <a:lstStyle/>
-          <a:p>
-            <a:pPr algn="l">
-              <a:lnSpc>
-                <a:spcPct val="110000"/>
-              </a:lnSpc>
-              <a:spcAft>
-                <a:spcPts val="300"/>
-              </a:spcAft>
-            </a:pPr>
-            <a:r>
               <a:rPr sz="1400" b="0">
                 <a:solidFill>
                   <a:srgbClr val="1F2A3A"/>
@@ -30721,45 +30587,26 @@
                 <a:ea typeface="맑은 고딕"/>
                 <a:cs typeface="맑은 고딕"/>
               </a:rPr>
-              <a:t>읽은 값마다 어느 시스템에서 언제 읽었는지를 붙인다.</a:t>
-            </a:r>
-          </a:p>
-          <a:p>
-            <a:pPr algn="l">
-              <a:lnSpc>
-                <a:spcPct val="110000"/>
-              </a:lnSpc>
-              <a:spcAft>
-                <a:spcPts val="300"/>
-              </a:spcAft>
-            </a:pPr>
-            <a:r>
-              <a:rPr sz="1400" b="0">
-                <a:solidFill>
-                  <a:srgbClr val="1F2A3A"/>
-                </a:solidFill>
-                <a:latin typeface="맑은 고딕"/>
-                <a:ea typeface="맑은 고딕"/>
-                <a:cs typeface="맑은 고딕"/>
-              </a:rPr>
-              <a:t>예: 납기 오더는 업무 DB에서, 유온은 시계열 DB에서 읽는다.</a:t>
-            </a:r>
-          </a:p>
-        </p:txBody>
-      </p:sp>
-      <p:sp>
-        <p:nvSpPr>
-          <p:cNvPr id="12" name="Rectangle 11"/>
+              <a:t>프롬프트, 명세, 코드 가운데 고칠 곳을 가려 고치고 다시 실행한다</a:t>
+            </a:r>
+          </a:p>
+        </p:txBody>
+      </p:sp>
+      <p:sp>
+        <p:nvSpPr>
+          <p:cNvPr id="16" name="Rounded Rectangle 15"/>
           <p:cNvSpPr/>
           <p:nvPr/>
         </p:nvSpPr>
         <p:spPr>
           <a:xfrm>
-            <a:off x="548640" y="4668012"/>
-            <a:ext cx="11094415" cy="13716"/>
-          </a:xfrm>
-          <a:prstGeom prst="rect">
-            <a:avLst/>
+            <a:off x="4566818" y="5041392"/>
+            <a:ext cx="868680" cy="292608"/>
+          </a:xfrm>
+          <a:prstGeom prst="roundRect">
+            <a:avLst>
+              <a:gd name="adj" fmla="val 50000"/>
+            </a:avLst>
           </a:prstGeom>
           <a:solidFill>
             <a:srgbClr val="D3D9E1"/>
@@ -30778,14 +30625,14 @@
       </p:sp>
       <p:sp>
         <p:nvSpPr>
-          <p:cNvPr id="13" name="TextBox 12"/>
-          <p:cNvSpPr txBox="1"/>
-          <p:nvPr/>
-        </p:nvSpPr>
-        <p:spPr>
-          <a:xfrm>
-            <a:off x="640080" y="4677156"/>
-            <a:ext cx="3291839" cy="1371600"/>
+          <p:cNvPr id="17" name="TextBox 16"/>
+          <p:cNvSpPr txBox="1"/>
+          <p:nvPr/>
+        </p:nvSpPr>
+        <p:spPr>
+          <a:xfrm>
+            <a:off x="4566818" y="5041392"/>
+            <a:ext cx="868680" cy="292608"/>
           </a:xfrm>
           <a:prstGeom prst="rect">
             <a:avLst/>
@@ -30796,12 +30643,137 @@
           <a:bodyPr wrap="square" anchor="ctr"/>
           <a:lstStyle/>
           <a:p>
+            <a:pPr algn="ctr">
+              <a:lnSpc>
+                <a:spcPct val="110000"/>
+              </a:lnSpc>
+            </a:pPr>
+            <a:r>
+              <a:rPr sz="1200" b="1">
+                <a:solidFill>
+                  <a:srgbClr val="13294B"/>
+                </a:solidFill>
+                <a:latin typeface="맑은 고딕"/>
+                <a:ea typeface="맑은 고딕"/>
+                <a:cs typeface="맑은 고딕"/>
+              </a:rPr>
+              <a:t>고칠 곳</a:t>
+            </a:r>
+          </a:p>
+        </p:txBody>
+      </p:sp>
+      <p:sp>
+        <p:nvSpPr>
+          <p:cNvPr id="18" name="Rounded Rectangle 17"/>
+          <p:cNvSpPr/>
+          <p:nvPr/>
+        </p:nvSpPr>
+        <p:spPr>
+          <a:xfrm>
+            <a:off x="8127796" y="2511552"/>
+            <a:ext cx="3515258" cy="2959607"/>
+          </a:xfrm>
+          <a:prstGeom prst="roundRect">
+            <a:avLst>
+              <a:gd name="adj" fmla="val 4000"/>
+            </a:avLst>
+          </a:prstGeom>
+          <a:solidFill>
+            <a:srgbClr val="FFFFFF"/>
+          </a:solidFill>
+          <a:ln w="28575">
+            <a:solidFill>
+              <a:srgbClr val="5CB8F2"/>
+            </a:solidFill>
+          </a:ln>
+        </p:spPr>
+        <p:txBody>
+          <a:bodyPr rtlCol="0" anchor="ctr"/>
+          <a:lstStyle/>
+          <a:p>
+            <a:pPr algn="ctr"/>
+          </a:p>
+        </p:txBody>
+      </p:sp>
+      <p:sp>
+        <p:nvSpPr>
+          <p:cNvPr id="19" name="Oval 18"/>
+          <p:cNvSpPr/>
+          <p:nvPr/>
+        </p:nvSpPr>
+        <p:spPr>
+          <a:xfrm>
+            <a:off x="8356396" y="2712720"/>
+            <a:ext cx="731520" cy="731520"/>
+          </a:xfrm>
+          <a:prstGeom prst="ellipse">
+            <a:avLst/>
+          </a:prstGeom>
+          <a:solidFill>
+            <a:srgbClr val="5CB8F2"/>
+          </a:solidFill>
+          <a:ln>
+            <a:noFill/>
+          </a:ln>
+        </p:spPr>
+        <p:txBody>
+          <a:bodyPr rtlCol="0" anchor="ctr"/>
+          <a:lstStyle/>
+          <a:p>
+            <a:pPr algn="ctr"/>
+          </a:p>
+        </p:txBody>
+      </p:sp>
+      <p:pic>
+        <p:nvPicPr>
+          <p:cNvPr id="20" name="아이콘:repeat" descr="repeat_13294B_1.6.png"/>
+          <p:cNvPicPr>
+            <a:picLocks noChangeAspect="1"/>
+          </p:cNvPicPr>
+          <p:nvPr/>
+        </p:nvPicPr>
+        <p:blipFill>
+          <a:blip r:embed="rId5"/>
+          <a:stretch>
+            <a:fillRect/>
+          </a:stretch>
+        </p:blipFill>
+        <p:spPr>
+          <a:xfrm>
+            <a:off x="8510016" y="2866339"/>
+            <a:ext cx="424281" cy="424281"/>
+          </a:xfrm>
+          <a:prstGeom prst="rect">
+            <a:avLst/>
+          </a:prstGeom>
+        </p:spPr>
+      </p:pic>
+      <p:sp>
+        <p:nvSpPr>
+          <p:cNvPr id="21" name="TextBox 20"/>
+          <p:cNvSpPr txBox="1"/>
+          <p:nvPr/>
+        </p:nvSpPr>
+        <p:spPr>
+          <a:xfrm>
+            <a:off x="8292388" y="3535680"/>
+            <a:ext cx="3186074" cy="1432559"/>
+          </a:xfrm>
+          <a:prstGeom prst="rect">
+            <a:avLst/>
+          </a:prstGeom>
+          <a:noFill/>
+        </p:spPr>
+        <p:txBody>
+          <a:bodyPr wrap="square" anchor="t"/>
+          <a:lstStyle/>
+          <a:p>
             <a:pPr algn="l">
               <a:lnSpc>
                 <a:spcPct val="110000"/>
               </a:lnSpc>
               <a:spcAft>
-                <a:spcPts val="200"/>
+                <a:spcPts val="400"/>
               </a:spcAft>
             </a:pPr>
             <a:r>
@@ -30813,7 +30785,7 @@
                 <a:ea typeface="맑은 고딕"/>
                 <a:cs typeface="맑은 고딕"/>
               </a:rPr>
-              <a:t>일부만 읽힌 결과</a:t>
+              <a:t>전체 회귀</a:t>
             </a:r>
           </a:p>
           <a:p>
@@ -30822,33 +30794,64 @@
                 <a:spcPct val="110000"/>
               </a:lnSpc>
               <a:spcAft>
-                <a:spcPts val="200"/>
+                <a:spcPts val="400"/>
               </a:spcAft>
             </a:pPr>
             <a:r>
-              <a:rPr sz="1150" b="0">
-                <a:solidFill>
-                  <a:srgbClr val="556175"/>
-                </a:solidFill>
-                <a:latin typeface="맑은 고딕"/>
-                <a:ea typeface="맑은 고딕"/>
-                <a:cs typeface="맑은 고딕"/>
-              </a:rPr>
-              <a:t>부분 결과</a:t>
-            </a:r>
-          </a:p>
-        </p:txBody>
-      </p:sp>
-      <p:sp>
-        <p:nvSpPr>
-          <p:cNvPr id="14" name="TextBox 13"/>
-          <p:cNvSpPr txBox="1"/>
-          <p:nvPr/>
-        </p:nvSpPr>
-        <p:spPr>
-          <a:xfrm>
-            <a:off x="4023359" y="4677156"/>
-            <a:ext cx="7528255" cy="1371600"/>
+              <a:rPr sz="1400" b="0">
+                <a:solidFill>
+                  <a:srgbClr val="1F2A3A"/>
+                </a:solidFill>
+                <a:latin typeface="맑은 고딕"/>
+                <a:ea typeface="맑은 고딕"/>
+                <a:cs typeface="맑은 고딕"/>
+              </a:rPr>
+              <a:t>긴급 조건이 동작하면서 기존의 일반 요청, 보류, 거절 조건이 그대로인지를 확인한다</a:t>
+            </a:r>
+          </a:p>
+        </p:txBody>
+      </p:sp>
+      <p:sp>
+        <p:nvSpPr>
+          <p:cNvPr id="22" name="Rounded Rectangle 21"/>
+          <p:cNvSpPr/>
+          <p:nvPr/>
+        </p:nvSpPr>
+        <p:spPr>
+          <a:xfrm>
+            <a:off x="8356396" y="5041392"/>
+            <a:ext cx="1021080" cy="292608"/>
+          </a:xfrm>
+          <a:prstGeom prst="roundRect">
+            <a:avLst>
+              <a:gd name="adj" fmla="val 50000"/>
+            </a:avLst>
+          </a:prstGeom>
+          <a:solidFill>
+            <a:srgbClr val="5CB8F2"/>
+          </a:solidFill>
+          <a:ln>
+            <a:noFill/>
+          </a:ln>
+        </p:spPr>
+        <p:txBody>
+          <a:bodyPr rtlCol="0" anchor="ctr"/>
+          <a:lstStyle/>
+          <a:p>
+            <a:pPr algn="ctr"/>
+          </a:p>
+        </p:txBody>
+      </p:sp>
+      <p:sp>
+        <p:nvSpPr>
+          <p:cNvPr id="23" name="TextBox 22"/>
+          <p:cNvSpPr txBox="1"/>
+          <p:nvPr/>
+        </p:nvSpPr>
+        <p:spPr>
+          <a:xfrm>
+            <a:off x="8356396" y="5041392"/>
+            <a:ext cx="1021080" cy="292608"/>
           </a:xfrm>
           <a:prstGeom prst="rect">
             <a:avLst/>
@@ -30859,24 +30862,21 @@
           <a:bodyPr wrap="square" anchor="ctr"/>
           <a:lstStyle/>
           <a:p>
-            <a:pPr algn="l">
-              <a:lnSpc>
-                <a:spcPct val="110000"/>
-              </a:lnSpc>
-              <a:spcAft>
-                <a:spcPts val="300"/>
-              </a:spcAft>
-            </a:pPr>
-            <a:r>
-              <a:rPr sz="1400" b="0">
-                <a:solidFill>
-                  <a:srgbClr val="1F2A3A"/>
-                </a:solidFill>
-                <a:latin typeface="맑은 고딕"/>
-                <a:ea typeface="맑은 고딕"/>
-                <a:cs typeface="맑은 고딕"/>
-              </a:rPr>
-              <a:t>한 출처가 실패하면 읽힌 값만 주고, 실패한 출처와 그 사유를 함께 알린다.</a:t>
+            <a:pPr algn="ctr">
+              <a:lnSpc>
+                <a:spcPct val="110000"/>
+              </a:lnSpc>
+            </a:pPr>
+            <a:r>
+              <a:rPr sz="1200" b="1">
+                <a:solidFill>
+                  <a:srgbClr val="13294B"/>
+                </a:solidFill>
+                <a:latin typeface="맑은 고딕"/>
+                <a:ea typeface="맑은 고딕"/>
+                <a:cs typeface="맑은 고딕"/>
+              </a:rPr>
+              <a:t>유지 확인</a:t>
             </a:r>
           </a:p>
         </p:txBody>
@@ -32724,7 +32724,7 @@
       </p:sp>
       <p:pic>
         <p:nvPicPr>
-          <p:cNvPr id="6" name="삽화:더해진것.svg" descr="illust_6743247755273032733_1791770361.png"/>
+          <p:cNvPr id="6" name="삽화:더해진것.svg" descr="illust_9175939644773069680_1791770361.png"/>
           <p:cNvPicPr>
             <a:picLocks noChangeAspect="1"/>
           </p:cNvPicPr>
@@ -34718,7 +34718,7 @@
       </p:sp>
       <p:pic>
         <p:nvPicPr>
-          <p:cNvPr id="6" name="삽화:사건위장치.svg" descr="illust_3116920256466686895_1791770361.png"/>
+          <p:cNvPr id="6" name="삽화:사건위장치.svg" descr="illust_5852501928380761779_1791770361.png"/>
           <p:cNvPicPr>
             <a:picLocks noChangeAspect="1"/>
           </p:cNvPicPr>
@@ -36289,7 +36289,7 @@
       </p:sp>
       <p:pic>
         <p:nvPicPr>
-          <p:cNvPr id="6" name="삽화:근거자리.svg" descr="illust_25736737251932724_1791770880.png"/>
+          <p:cNvPr id="6" name="삽화:근거자리.svg" descr="illust_7274830796665304051_1791770880.png"/>
           <p:cNvPicPr>
             <a:picLocks noChangeAspect="1"/>
           </p:cNvPicPr>
@@ -37806,7 +37806,7 @@
       </p:sp>
       <p:pic>
         <p:nvPicPr>
-          <p:cNvPr id="6" name="삽화:두문.svg" descr="illust_1804250236209205072_1791770880.png"/>
+          <p:cNvPr id="6" name="삽화:두문.svg" descr="illust_4771882715604455688_1791770880.png"/>
           <p:cNvPicPr>
             <a:picLocks noChangeAspect="1"/>
           </p:cNvPicPr>
@@ -41651,7 +41651,7 @@
       </p:sp>
       <p:pic>
         <p:nvPicPr>
-          <p:cNvPr id="6" name="삽화:명세와실행.svg" descr="illust_1008336715061584643_1791770361.png"/>
+          <p:cNvPr id="6" name="삽화:명세와실행.svg" descr="illust_3678528579534693561_1791770361.png"/>
           <p:cNvPicPr>
             <a:picLocks noChangeAspect="1"/>
           </p:cNvPicPr>
@@ -42183,7 +42183,7 @@
       </p:sp>
       <p:pic>
         <p:nvPicPr>
-          <p:cNvPr id="6" name="삽화:세산출물.svg" descr="illust_2146002995016036356_1791770880.png"/>
+          <p:cNvPr id="6" name="삽화:세산출물.svg" descr="illust_5146583767105451621_1791770880.png"/>
           <p:cNvPicPr>
             <a:picLocks noChangeAspect="1"/>
           </p:cNvPicPr>
@@ -44096,7 +44096,7 @@
       </p:sp>
       <p:pic>
         <p:nvPicPr>
-          <p:cNvPr id="6" name="삽화:산출물이음.svg" descr="illust_4488752189449270094_1791770880.png"/>
+          <p:cNvPr id="6" name="삽화:산출물이음.svg" descr="illust_7615834083831827532_1791770880.png"/>
           <p:cNvPicPr>
             <a:picLocks noChangeAspect="1"/>
           </p:cNvPicPr>
@@ -55571,7 +55571,7 @@
       </p:sp>
       <p:pic>
         <p:nvPicPr>
-          <p:cNvPr id="6" name="삽화:세부분.svg" descr="illust_1255170885538559570_1791770361.png"/>
+          <p:cNvPr id="6" name="삽화:세부분.svg" descr="illust_5387748756407147303_1791770361.png"/>
           <p:cNvPicPr>
             <a:picLocks noChangeAspect="1"/>
           </p:cNvPicPr>
